--- a/presentations/PF_L03_FilingRoom_Lesson.pptx
+++ b/presentations/PF_L03_FilingRoom_Lesson.pptx
@@ -19,9 +19,10 @@
     <p:sldId id="267" r:id="rId13"/>
     <p:sldId id="268" r:id="rId14"/>
     <p:sldId id="269" r:id="rId15"/>
+    <p:sldId id="270" r:id="rId16"/>
   </p:sldIdLst>
   <p:notesMasterIdLst>
-    <p:notesMasterId r:id="rId16"/>
+    <p:notesMasterId r:id="rId17"/>
   </p:notesMasterIdLst>
   <p:sldSz cx="12192000" cy="6858000"/>
   <p:notesSz cx="6858000" cy="12192000"/>
@@ -692,7 +693,13 @@
           <a:p>
             <a:r>
               <a:rPr lang="en-US" dirty="0"/>
-              <a:t>Make them commit to an answer on paper before they tap the star. Guessing first costs them the learning.</a:t>
+              <a:t>The answer is B: It is deleted.
+Do not say it yet. Every pupil commits first - fingers, whiteboards or a show of hands on each letter in turn - and you count the split before anyone can change their mind.
+IF MOST OF THE CLASS IS RIGHT: say why it is right in one sentence and go straight on to the independent work.
+IF A SIGNIFICANT GROUP IS ON ONE WRONG LETTER: that option is the misconception to teach against before anyone goes on. Go back to station 4, Writing to a file, and work through its example again, aloud, with the class watching, then re-ask this question.
+The course's own response to a wrong answer here: Mode "w" starts the file again from empty, so use mode "a" when the old data must be kept.
+A limitation, stated rather than papered over: one response covers every wrong option; it does not say what to revisit for each one. The course does not record what each separate wrong option means, and this slide does not invent it. Decide your own reteach for each option before the lesson; the options above are the start of it.
+This is a real activity from the experience (pf-l03-s4-c1), so the wording here is the wording a pupil will see.</a:t>
             </a:r>
             <a:endParaRPr lang="en-US" dirty="0"/>
           </a:p>
@@ -780,7 +787,7 @@
           <a:p>
             <a:r>
               <a:rPr lang="en-US" dirty="0"/>
-              <a:t>Use these as a settler, or as something for early finishers to read in the experience.</a:t>
+              <a:t>Make them commit to an answer on paper before they tap the star. Guessing first costs them the learning.</a:t>
             </a:r>
             <a:endParaRPr lang="en-US" dirty="0"/>
           </a:p>
@@ -868,7 +875,7 @@
           <a:p>
             <a:r>
               <a:rPr lang="en-US" dirty="0"/>
-              <a:t>Timed and silent. Mark against the answer sheet, then ask students to record their weakest area.</a:t>
+              <a:t>Use these as a settler, or as something for early finishers to read in the experience.</a:t>
             </a:r>
             <a:endParaRPr lang="en-US" dirty="0"/>
           </a:p>
@@ -956,7 +963,7 @@
           <a:p>
             <a:r>
               <a:rPr lang="en-US" dirty="0"/>
-              <a:t>Students copy their score-screen breakdown onto the worksheet, then rate themselves here.</a:t>
+              <a:t>Timed and silent. Mark against the answer sheet, then ask students to record their weakest area.</a:t>
             </a:r>
             <a:endParaRPr lang="en-US" dirty="0"/>
           </a:p>
@@ -980,6 +987,94 @@
             <a:fld id="{F7021451-1387-4CA6-816F-3879F97B5CBC}" type="slidenum">
               <a:rPr lang="en-US"/>
               <a:t>14</a:t>
+            </a:fld>
+            <a:endParaRPr lang="en-US"/>
+          </a:p>
+        </p:txBody>
+      </p:sp>
+    </p:spTree>
+    <p:extLst>
+      <p:ext uri="{BB962C8B-B14F-4D97-AF65-F5344CB8AC3E}">
+        <p14:creationId xmlns:p14="http://schemas.microsoft.com/office/powerpoint/2010/main" val="1024086991"/>
+      </p:ext>
+    </p:extLst>
+  </p:cSld>
+  <p:clrMapOvr>
+    <a:masterClrMapping/>
+  </p:clrMapOvr>
+</p:notes>
+</file>
+
+<file path=ppt/notesSlides/notesSlide15.xml><?xml version="1.0" encoding="utf-8"?>
+<p:notes xmlns:a="http://schemas.openxmlformats.org/drawingml/2006/main" xmlns:r="http://schemas.openxmlformats.org/officeDocument/2006/relationships" xmlns:p="http://schemas.openxmlformats.org/presentationml/2006/main">
+  <p:cSld>
+    <p:spTree>
+      <p:nvGrpSpPr>
+        <p:cNvPr id="1" name=""/>
+        <p:cNvGrpSpPr/>
+        <p:nvPr/>
+      </p:nvGrpSpPr>
+      <p:grpSpPr>
+        <a:xfrm>
+          <a:off x="0" y="0"/>
+          <a:ext cx="0" cy="0"/>
+          <a:chOff x="0" y="0"/>
+          <a:chExt cx="0" cy="0"/>
+        </a:xfrm>
+      </p:grpSpPr>
+      <p:sp>
+        <p:nvSpPr>
+          <p:cNvPr id="2" name="Slide Image Placeholder 1"/>
+          <p:cNvSpPr>
+            <a:spLocks noGrp="1" noRot="1" noChangeAspect="1"/>
+          </p:cNvSpPr>
+          <p:nvPr>
+            <p:ph type="sldImg"/>
+          </p:nvPr>
+        </p:nvSpPr>
+        <p:spPr/>
+      </p:sp>
+      <p:sp>
+        <p:nvSpPr>
+          <p:cNvPr id="3" name="Notes Placeholder 2"/>
+          <p:cNvSpPr>
+            <a:spLocks noGrp="1"/>
+          </p:cNvSpPr>
+          <p:nvPr>
+            <p:ph type="body" idx="1"/>
+          </p:nvPr>
+        </p:nvSpPr>
+        <p:spPr/>
+        <p:txBody>
+          <a:bodyPr/>
+          <a:lstStyle/>
+          <a:p>
+            <a:r>
+              <a:rPr lang="en-US" dirty="0"/>
+              <a:t>Students copy their score-screen breakdown onto the worksheet, then rate themselves here.</a:t>
+            </a:r>
+            <a:endParaRPr lang="en-US" dirty="0"/>
+          </a:p>
+        </p:txBody>
+      </p:sp>
+      <p:sp>
+        <p:nvSpPr>
+          <p:cNvPr id="4" name="Slide Number Placeholder 3"/>
+          <p:cNvSpPr>
+            <a:spLocks noGrp="1"/>
+          </p:cNvSpPr>
+          <p:nvPr>
+            <p:ph type="sldNum" sz="quarter" idx="10"/>
+          </p:nvPr>
+        </p:nvSpPr>
+        <p:spPr/>
+        <p:txBody>
+          <a:bodyPr/>
+          <a:lstStyle/>
+          <a:p>
+            <a:fld id="{F7021451-1387-4CA6-816F-3879F97B5CBC}" type="slidenum">
+              <a:rPr lang="en-US"/>
+              <a:t>15</a:t>
             </a:fld>
             <a:endParaRPr lang="en-US"/>
           </a:p>
@@ -2949,12 +3044,12 @@
         </p:nvSpPr>
         <p:spPr>
           <a:xfrm>
-            <a:off x="502920" y="438912"/>
-            <a:ext cx="3108960" cy="502920"/>
+            <a:off x="502920" y="457200"/>
+            <a:ext cx="1051560" cy="420624"/>
           </a:xfrm>
           <a:prstGeom prst="roundRect">
             <a:avLst>
-              <a:gd name="adj" fmla="val 18182"/>
+              <a:gd name="adj" fmla="val 21739"/>
             </a:avLst>
           </a:prstGeom>
           <a:solidFill>
@@ -2971,8 +3066,8 @@
         </p:nvSpPr>
         <p:spPr>
           <a:xfrm>
-            <a:off x="502920" y="438912"/>
-            <a:ext cx="3108960" cy="502920"/>
+            <a:off x="502920" y="457200"/>
+            <a:ext cx="1051560" cy="420624"/>
           </a:xfrm>
           <a:prstGeom prst="rect">
             <a:avLst/>
@@ -2988,7 +3083,7 @@
               <a:buNone/>
             </a:pPr>
             <a:r>
-              <a:rPr lang="en-US" sz="1300" b="1" dirty="0">
+              <a:rPr lang="en-US" sz="1200" b="1" dirty="0">
                 <a:solidFill>
                   <a:srgbClr val="101828"/>
                 </a:solidFill>
@@ -2996,9 +3091,9 @@
                 <a:ea typeface="IBM Plex Mono" pitchFamily="34" charset="-122"/>
                 <a:cs typeface="IBM Plex Mono" pitchFamily="34" charset="-120"/>
               </a:rPr>
-              <a:t>★  FINAL CHALLENGE</a:t>
-            </a:r>
-            <a:endParaRPr lang="en-US" sz="1300" dirty="0"/>
+              <a:t>CHECK</a:t>
+            </a:r>
+            <a:endParaRPr lang="en-US" sz="1200" dirty="0"/>
           </a:p>
         </p:txBody>
       </p:sp>
@@ -3010,8 +3105,8 @@
         </p:nvSpPr>
         <p:spPr>
           <a:xfrm>
-            <a:off x="502920" y="1097280"/>
-            <a:ext cx="11155680" cy="731520"/>
+            <a:off x="1737360" y="457200"/>
+            <a:ext cx="9875520" cy="420624"/>
           </a:xfrm>
           <a:prstGeom prst="rect">
             <a:avLst/>
@@ -3027,34 +3122,76 @@
               <a:buNone/>
             </a:pPr>
             <a:r>
-              <a:rPr lang="en-US" sz="3400" b="1" dirty="0">
-                <a:solidFill>
-                  <a:srgbClr val="101828"/>
+              <a:rPr lang="en-US" sz="1500" dirty="0">
+                <a:solidFill>
+                  <a:srgbClr val="667085"/>
                 </a:solidFill>
                 <a:latin typeface="IBM Plex Sans" pitchFamily="34" charset="0"/>
                 <a:ea typeface="IBM Plex Sans" pitchFamily="34" charset="-122"/>
                 <a:cs typeface="IBM Plex Sans" pitchFamily="34" charset="-120"/>
               </a:rPr>
-              <a:t>Read the file</a:t>
-            </a:r>
-            <a:endParaRPr lang="en-US" sz="3400" dirty="0"/>
-          </a:p>
-        </p:txBody>
-      </p:sp>
-      <p:sp>
-        <p:nvSpPr>
-          <p:cNvPr id="8" name="Shape 6"/>
+              <a:t>Hands down. Everyone commits.</a:t>
+            </a:r>
+            <a:endParaRPr lang="en-US" sz="1500" dirty="0"/>
+          </a:p>
+        </p:txBody>
+      </p:sp>
+      <p:sp>
+        <p:nvSpPr>
+          <p:cNvPr id="8" name="Text 6"/>
+          <p:cNvSpPr txBox="1"/>
+          <p:nvPr/>
+        </p:nvSpPr>
+        <p:spPr>
+          <a:xfrm>
+            <a:off x="502920" y="1097280"/>
+            <a:ext cx="11155680" cy="914400"/>
+          </a:xfrm>
+          <a:prstGeom prst="rect">
+            <a:avLst/>
+          </a:prstGeom>
+          <a:noFill/>
+          <a:ln/>
+        </p:spPr>
+        <p:txBody>
+          <a:bodyPr wrap="square" lIns="0" tIns="0" rIns="0" bIns="0" rtlCol="0" anchor="ctr"/>
+          <a:lstStyle/>
+          <a:p>
+            <a:pPr indent="0" marL="0">
+              <a:lnSpc>
+                <a:spcPct val="115000"/>
+              </a:lnSpc>
+              <a:buNone/>
+            </a:pPr>
+            <a:r>
+              <a:rPr lang="en-US" sz="2600" b="1" dirty="0">
+                <a:solidFill>
+                  <a:srgbClr val="101828"/>
+                </a:solidFill>
+                <a:latin typeface="IBM Plex Sans" pitchFamily="34" charset="0"/>
+                <a:ea typeface="IBM Plex Sans" pitchFamily="34" charset="-122"/>
+                <a:cs typeface="IBM Plex Sans" pitchFamily="34" charset="-120"/>
+              </a:rPr>
+              <a:t>In Python 3, what happens to data already in a file when it is opened with mode "w"?</a:t>
+            </a:r>
+            <a:endParaRPr lang="en-US" sz="2600" dirty="0"/>
+          </a:p>
+        </p:txBody>
+      </p:sp>
+      <p:sp>
+        <p:nvSpPr>
+          <p:cNvPr id="9" name="Shape 7"/>
           <p:cNvSpPr/>
           <p:nvPr/>
         </p:nvSpPr>
         <p:spPr>
           <a:xfrm>
-            <a:off x="502920" y="2011680"/>
-            <a:ext cx="11155680" cy="2194560"/>
+            <a:off x="502920" y="2148840"/>
+            <a:ext cx="11155680" cy="731520"/>
           </a:xfrm>
           <a:prstGeom prst="roundRect">
             <a:avLst>
-              <a:gd name="adj" fmla="val 5000"/>
+              <a:gd name="adj" fmla="val 15000"/>
             </a:avLst>
           </a:prstGeom>
           <a:solidFill>
@@ -3062,7 +3199,7 @@
           </a:solidFill>
           <a:ln w="15875">
             <a:solidFill>
-              <a:srgbClr val="2D63FF"/>
+              <a:srgbClr val="D9DEE7"/>
             </a:solidFill>
             <a:prstDash val="solid"/>
           </a:ln>
@@ -3070,14 +3207,75 @@
       </p:sp>
       <p:sp>
         <p:nvSpPr>
-          <p:cNvPr id="9" name="Text 7"/>
-          <p:cNvSpPr txBox="1"/>
-          <p:nvPr/>
-        </p:nvSpPr>
-        <p:spPr>
-          <a:xfrm>
-            <a:off x="1005840" y="2331720"/>
-            <a:ext cx="10149840" cy="1554480"/>
+          <p:cNvPr id="10" name="Shape 8"/>
+          <p:cNvSpPr/>
+          <p:nvPr/>
+        </p:nvSpPr>
+        <p:spPr>
+          <a:xfrm>
+            <a:off x="777240" y="2295144"/>
+            <a:ext cx="438912" cy="438912"/>
+          </a:xfrm>
+          <a:prstGeom prst="roundRect">
+            <a:avLst>
+              <a:gd name="adj" fmla="val 20833"/>
+            </a:avLst>
+          </a:prstGeom>
+          <a:solidFill>
+            <a:srgbClr val="EEF2FB"/>
+          </a:solidFill>
+          <a:ln/>
+        </p:spPr>
+      </p:sp>
+      <p:sp>
+        <p:nvSpPr>
+          <p:cNvPr id="11" name="Text 9"/>
+          <p:cNvSpPr txBox="1"/>
+          <p:nvPr/>
+        </p:nvSpPr>
+        <p:spPr>
+          <a:xfrm>
+            <a:off x="777240" y="2295144"/>
+            <a:ext cx="438912" cy="438912"/>
+          </a:xfrm>
+          <a:prstGeom prst="rect">
+            <a:avLst/>
+          </a:prstGeom>
+          <a:noFill/>
+          <a:ln/>
+        </p:spPr>
+        <p:txBody>
+          <a:bodyPr wrap="square" lIns="0" tIns="0" rIns="0" bIns="0" rtlCol="0" anchor="ctr"/>
+          <a:lstStyle/>
+          <a:p>
+            <a:pPr algn="ctr" indent="0" marL="0">
+              <a:buNone/>
+            </a:pPr>
+            <a:r>
+              <a:rPr lang="en-US" sz="1300" b="1" dirty="0">
+                <a:solidFill>
+                  <a:srgbClr val="2D63FF"/>
+                </a:solidFill>
+                <a:latin typeface="IBM Plex Mono" pitchFamily="34" charset="0"/>
+                <a:ea typeface="IBM Plex Mono" pitchFamily="34" charset="-122"/>
+                <a:cs typeface="IBM Plex Mono" pitchFamily="34" charset="-120"/>
+              </a:rPr>
+              <a:t>A</a:t>
+            </a:r>
+            <a:endParaRPr lang="en-US" sz="1300" dirty="0"/>
+          </a:p>
+        </p:txBody>
+      </p:sp>
+      <p:sp>
+        <p:nvSpPr>
+          <p:cNvPr id="12" name="Text 10"/>
+          <p:cNvSpPr txBox="1"/>
+          <p:nvPr/>
+        </p:nvSpPr>
+        <p:spPr>
+          <a:xfrm>
+            <a:off x="1417320" y="2148840"/>
+            <a:ext cx="10058400" cy="731520"/>
           </a:xfrm>
           <a:prstGeom prst="rect">
             <a:avLst/>
@@ -3091,12 +3289,12 @@
           <a:p>
             <a:pPr indent="0" marL="0">
               <a:lnSpc>
-                <a:spcPct val="130000"/>
+                <a:spcPct val="115000"/>
               </a:lnSpc>
               <a:buNone/>
             </a:pPr>
             <a:r>
-              <a:rPr lang="en-US" sz="2200" dirty="0">
+              <a:rPr lang="en-US" sz="1700" dirty="0">
                 <a:solidFill>
                   <a:srgbClr val="101828"/>
                 </a:solidFill>
@@ -3104,22 +3302,110 @@
                 <a:ea typeface="IBM Plex Sans" pitchFamily="34" charset="-122"/>
                 <a:cs typeface="IBM Plex Sans" pitchFamily="34" charset="-120"/>
               </a:rPr>
-              <a:t>Five lines of the OCR Exam Reference Language, jumbled. Tap the star and put them into a working program that outputs every line of scores.txt.</a:t>
-            </a:r>
-            <a:endParaRPr lang="en-US" sz="2200" dirty="0"/>
-          </a:p>
-        </p:txBody>
-      </p:sp>
-      <p:sp>
-        <p:nvSpPr>
-          <p:cNvPr id="10" name="Text 8"/>
-          <p:cNvSpPr txBox="1"/>
-          <p:nvPr/>
-        </p:nvSpPr>
-        <p:spPr>
-          <a:xfrm>
-            <a:off x="502920" y="4526280"/>
-            <a:ext cx="11155680" cy="457200"/>
+              <a:t>It is copied into a backup file first</a:t>
+            </a:r>
+            <a:endParaRPr lang="en-US" sz="1700" dirty="0"/>
+          </a:p>
+        </p:txBody>
+      </p:sp>
+      <p:sp>
+        <p:nvSpPr>
+          <p:cNvPr id="13" name="Shape 11"/>
+          <p:cNvSpPr/>
+          <p:nvPr/>
+        </p:nvSpPr>
+        <p:spPr>
+          <a:xfrm>
+            <a:off x="502920" y="3017520"/>
+            <a:ext cx="11155680" cy="731520"/>
+          </a:xfrm>
+          <a:prstGeom prst="roundRect">
+            <a:avLst>
+              <a:gd name="adj" fmla="val 15000"/>
+            </a:avLst>
+          </a:prstGeom>
+          <a:solidFill>
+            <a:srgbClr val="FFFFFF"/>
+          </a:solidFill>
+          <a:ln w="15875">
+            <a:solidFill>
+              <a:srgbClr val="D9DEE7"/>
+            </a:solidFill>
+            <a:prstDash val="solid"/>
+          </a:ln>
+        </p:spPr>
+      </p:sp>
+      <p:sp>
+        <p:nvSpPr>
+          <p:cNvPr id="14" name="Shape 12"/>
+          <p:cNvSpPr/>
+          <p:nvPr/>
+        </p:nvSpPr>
+        <p:spPr>
+          <a:xfrm>
+            <a:off x="777240" y="3163824"/>
+            <a:ext cx="438912" cy="438912"/>
+          </a:xfrm>
+          <a:prstGeom prst="roundRect">
+            <a:avLst>
+              <a:gd name="adj" fmla="val 20833"/>
+            </a:avLst>
+          </a:prstGeom>
+          <a:solidFill>
+            <a:srgbClr val="EEF2FB"/>
+          </a:solidFill>
+          <a:ln/>
+        </p:spPr>
+      </p:sp>
+      <p:sp>
+        <p:nvSpPr>
+          <p:cNvPr id="15" name="Text 13"/>
+          <p:cNvSpPr txBox="1"/>
+          <p:nvPr/>
+        </p:nvSpPr>
+        <p:spPr>
+          <a:xfrm>
+            <a:off x="777240" y="3163824"/>
+            <a:ext cx="438912" cy="438912"/>
+          </a:xfrm>
+          <a:prstGeom prst="rect">
+            <a:avLst/>
+          </a:prstGeom>
+          <a:noFill/>
+          <a:ln/>
+        </p:spPr>
+        <p:txBody>
+          <a:bodyPr wrap="square" lIns="0" tIns="0" rIns="0" bIns="0" rtlCol="0" anchor="ctr"/>
+          <a:lstStyle/>
+          <a:p>
+            <a:pPr algn="ctr" indent="0" marL="0">
+              <a:buNone/>
+            </a:pPr>
+            <a:r>
+              <a:rPr lang="en-US" sz="1300" b="1" dirty="0">
+                <a:solidFill>
+                  <a:srgbClr val="2D63FF"/>
+                </a:solidFill>
+                <a:latin typeface="IBM Plex Mono" pitchFamily="34" charset="0"/>
+                <a:ea typeface="IBM Plex Mono" pitchFamily="34" charset="-122"/>
+                <a:cs typeface="IBM Plex Mono" pitchFamily="34" charset="-120"/>
+              </a:rPr>
+              <a:t>B</a:t>
+            </a:r>
+            <a:endParaRPr lang="en-US" sz="1300" dirty="0"/>
+          </a:p>
+        </p:txBody>
+      </p:sp>
+      <p:sp>
+        <p:nvSpPr>
+          <p:cNvPr id="16" name="Text 14"/>
+          <p:cNvSpPr txBox="1"/>
+          <p:nvPr/>
+        </p:nvSpPr>
+        <p:spPr>
+          <a:xfrm>
+            <a:off x="1417320" y="3017520"/>
+            <a:ext cx="10058400" cy="731520"/>
           </a:xfrm>
           <a:prstGeom prst="rect">
             <a:avLst/>
@@ -3132,20 +3418,283 @@
           <a:lstStyle/>
           <a:p>
             <a:pPr indent="0" marL="0">
-              <a:buNone/>
-            </a:pPr>
-            <a:r>
-              <a:rPr lang="en-US" sz="1600" dirty="0">
-                <a:solidFill>
-                  <a:srgbClr val="667085"/>
+              <a:lnSpc>
+                <a:spcPct val="115000"/>
+              </a:lnSpc>
+              <a:buNone/>
+            </a:pPr>
+            <a:r>
+              <a:rPr lang="en-US" sz="1700" dirty="0">
+                <a:solidFill>
+                  <a:srgbClr val="101828"/>
                 </a:solidFill>
                 <a:latin typeface="IBM Plex Sans" pitchFamily="34" charset="0"/>
                 <a:ea typeface="IBM Plex Sans" pitchFamily="34" charset="-122"/>
                 <a:cs typeface="IBM Plex Sans" pitchFamily="34" charset="-120"/>
               </a:rPr>
-              <a:t>Predict on paper first, then look down and test it.</a:t>
-            </a:r>
-            <a:endParaRPr lang="en-US" sz="1600" dirty="0"/>
+              <a:t>It is deleted</a:t>
+            </a:r>
+            <a:endParaRPr lang="en-US" sz="1700" dirty="0"/>
+          </a:p>
+        </p:txBody>
+      </p:sp>
+      <p:sp>
+        <p:nvSpPr>
+          <p:cNvPr id="17" name="Shape 15"/>
+          <p:cNvSpPr/>
+          <p:nvPr/>
+        </p:nvSpPr>
+        <p:spPr>
+          <a:xfrm>
+            <a:off x="502920" y="3886200"/>
+            <a:ext cx="11155680" cy="731520"/>
+          </a:xfrm>
+          <a:prstGeom prst="roundRect">
+            <a:avLst>
+              <a:gd name="adj" fmla="val 15000"/>
+            </a:avLst>
+          </a:prstGeom>
+          <a:solidFill>
+            <a:srgbClr val="FFFFFF"/>
+          </a:solidFill>
+          <a:ln w="15875">
+            <a:solidFill>
+              <a:srgbClr val="D9DEE7"/>
+            </a:solidFill>
+            <a:prstDash val="solid"/>
+          </a:ln>
+        </p:spPr>
+      </p:sp>
+      <p:sp>
+        <p:nvSpPr>
+          <p:cNvPr id="18" name="Shape 16"/>
+          <p:cNvSpPr/>
+          <p:nvPr/>
+        </p:nvSpPr>
+        <p:spPr>
+          <a:xfrm>
+            <a:off x="777240" y="4032504"/>
+            <a:ext cx="438912" cy="438912"/>
+          </a:xfrm>
+          <a:prstGeom prst="roundRect">
+            <a:avLst>
+              <a:gd name="adj" fmla="val 20833"/>
+            </a:avLst>
+          </a:prstGeom>
+          <a:solidFill>
+            <a:srgbClr val="EEF2FB"/>
+          </a:solidFill>
+          <a:ln/>
+        </p:spPr>
+      </p:sp>
+      <p:sp>
+        <p:nvSpPr>
+          <p:cNvPr id="19" name="Text 17"/>
+          <p:cNvSpPr txBox="1"/>
+          <p:nvPr/>
+        </p:nvSpPr>
+        <p:spPr>
+          <a:xfrm>
+            <a:off x="777240" y="4032504"/>
+            <a:ext cx="438912" cy="438912"/>
+          </a:xfrm>
+          <a:prstGeom prst="rect">
+            <a:avLst/>
+          </a:prstGeom>
+          <a:noFill/>
+          <a:ln/>
+        </p:spPr>
+        <p:txBody>
+          <a:bodyPr wrap="square" lIns="0" tIns="0" rIns="0" bIns="0" rtlCol="0" anchor="ctr"/>
+          <a:lstStyle/>
+          <a:p>
+            <a:pPr algn="ctr" indent="0" marL="0">
+              <a:buNone/>
+            </a:pPr>
+            <a:r>
+              <a:rPr lang="en-US" sz="1300" b="1" dirty="0">
+                <a:solidFill>
+                  <a:srgbClr val="2D63FF"/>
+                </a:solidFill>
+                <a:latin typeface="IBM Plex Mono" pitchFamily="34" charset="0"/>
+                <a:ea typeface="IBM Plex Mono" pitchFamily="34" charset="-122"/>
+                <a:cs typeface="IBM Plex Mono" pitchFamily="34" charset="-120"/>
+              </a:rPr>
+              <a:t>C</a:t>
+            </a:r>
+            <a:endParaRPr lang="en-US" sz="1300" dirty="0"/>
+          </a:p>
+        </p:txBody>
+      </p:sp>
+      <p:sp>
+        <p:nvSpPr>
+          <p:cNvPr id="20" name="Text 18"/>
+          <p:cNvSpPr txBox="1"/>
+          <p:nvPr/>
+        </p:nvSpPr>
+        <p:spPr>
+          <a:xfrm>
+            <a:off x="1417320" y="3886200"/>
+            <a:ext cx="10058400" cy="731520"/>
+          </a:xfrm>
+          <a:prstGeom prst="rect">
+            <a:avLst/>
+          </a:prstGeom>
+          <a:noFill/>
+          <a:ln/>
+        </p:spPr>
+        <p:txBody>
+          <a:bodyPr wrap="square" lIns="0" tIns="0" rIns="0" bIns="0" rtlCol="0" anchor="ctr"/>
+          <a:lstStyle/>
+          <a:p>
+            <a:pPr indent="0" marL="0">
+              <a:lnSpc>
+                <a:spcPct val="115000"/>
+              </a:lnSpc>
+              <a:buNone/>
+            </a:pPr>
+            <a:r>
+              <a:rPr lang="en-US" sz="1700" dirty="0">
+                <a:solidFill>
+                  <a:srgbClr val="101828"/>
+                </a:solidFill>
+                <a:latin typeface="IBM Plex Sans" pitchFamily="34" charset="0"/>
+                <a:ea typeface="IBM Plex Sans" pitchFamily="34" charset="-122"/>
+                <a:cs typeface="IBM Plex Sans" pitchFamily="34" charset="-120"/>
+              </a:rPr>
+              <a:t>It is kept, and the new data is added at the end</a:t>
+            </a:r>
+            <a:endParaRPr lang="en-US" sz="1700" dirty="0"/>
+          </a:p>
+        </p:txBody>
+      </p:sp>
+      <p:sp>
+        <p:nvSpPr>
+          <p:cNvPr id="21" name="Shape 19"/>
+          <p:cNvSpPr/>
+          <p:nvPr/>
+        </p:nvSpPr>
+        <p:spPr>
+          <a:xfrm>
+            <a:off x="502920" y="4754880"/>
+            <a:ext cx="11155680" cy="731520"/>
+          </a:xfrm>
+          <a:prstGeom prst="roundRect">
+            <a:avLst>
+              <a:gd name="adj" fmla="val 15000"/>
+            </a:avLst>
+          </a:prstGeom>
+          <a:solidFill>
+            <a:srgbClr val="FFFFFF"/>
+          </a:solidFill>
+          <a:ln w="15875">
+            <a:solidFill>
+              <a:srgbClr val="D9DEE7"/>
+            </a:solidFill>
+            <a:prstDash val="solid"/>
+          </a:ln>
+        </p:spPr>
+      </p:sp>
+      <p:sp>
+        <p:nvSpPr>
+          <p:cNvPr id="22" name="Shape 20"/>
+          <p:cNvSpPr/>
+          <p:nvPr/>
+        </p:nvSpPr>
+        <p:spPr>
+          <a:xfrm>
+            <a:off x="777240" y="4901184"/>
+            <a:ext cx="438912" cy="438912"/>
+          </a:xfrm>
+          <a:prstGeom prst="roundRect">
+            <a:avLst>
+              <a:gd name="adj" fmla="val 20833"/>
+            </a:avLst>
+          </a:prstGeom>
+          <a:solidFill>
+            <a:srgbClr val="EEF2FB"/>
+          </a:solidFill>
+          <a:ln/>
+        </p:spPr>
+      </p:sp>
+      <p:sp>
+        <p:nvSpPr>
+          <p:cNvPr id="23" name="Text 21"/>
+          <p:cNvSpPr txBox="1"/>
+          <p:nvPr/>
+        </p:nvSpPr>
+        <p:spPr>
+          <a:xfrm>
+            <a:off x="777240" y="4901184"/>
+            <a:ext cx="438912" cy="438912"/>
+          </a:xfrm>
+          <a:prstGeom prst="rect">
+            <a:avLst/>
+          </a:prstGeom>
+          <a:noFill/>
+          <a:ln/>
+        </p:spPr>
+        <p:txBody>
+          <a:bodyPr wrap="square" lIns="0" tIns="0" rIns="0" bIns="0" rtlCol="0" anchor="ctr"/>
+          <a:lstStyle/>
+          <a:p>
+            <a:pPr algn="ctr" indent="0" marL="0">
+              <a:buNone/>
+            </a:pPr>
+            <a:r>
+              <a:rPr lang="en-US" sz="1300" b="1" dirty="0">
+                <a:solidFill>
+                  <a:srgbClr val="2D63FF"/>
+                </a:solidFill>
+                <a:latin typeface="IBM Plex Mono" pitchFamily="34" charset="0"/>
+                <a:ea typeface="IBM Plex Mono" pitchFamily="34" charset="-122"/>
+                <a:cs typeface="IBM Plex Mono" pitchFamily="34" charset="-120"/>
+              </a:rPr>
+              <a:t>D</a:t>
+            </a:r>
+            <a:endParaRPr lang="en-US" sz="1300" dirty="0"/>
+          </a:p>
+        </p:txBody>
+      </p:sp>
+      <p:sp>
+        <p:nvSpPr>
+          <p:cNvPr id="24" name="Text 22"/>
+          <p:cNvSpPr txBox="1"/>
+          <p:nvPr/>
+        </p:nvSpPr>
+        <p:spPr>
+          <a:xfrm>
+            <a:off x="1417320" y="4754880"/>
+            <a:ext cx="10058400" cy="731520"/>
+          </a:xfrm>
+          <a:prstGeom prst="rect">
+            <a:avLst/>
+          </a:prstGeom>
+          <a:noFill/>
+          <a:ln/>
+        </p:spPr>
+        <p:txBody>
+          <a:bodyPr wrap="square" lIns="0" tIns="0" rIns="0" bIns="0" rtlCol="0" anchor="ctr"/>
+          <a:lstStyle/>
+          <a:p>
+            <a:pPr indent="0" marL="0">
+              <a:lnSpc>
+                <a:spcPct val="115000"/>
+              </a:lnSpc>
+              <a:buNone/>
+            </a:pPr>
+            <a:r>
+              <a:rPr lang="en-US" sz="1700" dirty="0">
+                <a:solidFill>
+                  <a:srgbClr val="101828"/>
+                </a:solidFill>
+                <a:latin typeface="IBM Plex Sans" pitchFamily="34" charset="0"/>
+                <a:ea typeface="IBM Plex Sans" pitchFamily="34" charset="-122"/>
+                <a:cs typeface="IBM Plex Sans" pitchFamily="34" charset="-120"/>
+              </a:rPr>
+              <a:t>It is kept, and the new data is added at the start</a:t>
+            </a:r>
+            <a:endParaRPr lang="en-US" sz="1700" dirty="0"/>
           </a:p>
         </p:txBody>
       </p:sp>
@@ -3281,14 +3830,75 @@
       </p:sp>
       <p:sp>
         <p:nvSpPr>
-          <p:cNvPr id="5" name="Text 3"/>
-          <p:cNvSpPr txBox="1"/>
-          <p:nvPr/>
-        </p:nvSpPr>
-        <p:spPr>
-          <a:xfrm>
-            <a:off x="502920" y="411480"/>
-            <a:ext cx="11155680" cy="777240"/>
+          <p:cNvPr id="5" name="Shape 3"/>
+          <p:cNvSpPr/>
+          <p:nvPr/>
+        </p:nvSpPr>
+        <p:spPr>
+          <a:xfrm>
+            <a:off x="502920" y="438912"/>
+            <a:ext cx="3108960" cy="502920"/>
+          </a:xfrm>
+          <a:prstGeom prst="roundRect">
+            <a:avLst>
+              <a:gd name="adj" fmla="val 18182"/>
+            </a:avLst>
+          </a:prstGeom>
+          <a:solidFill>
+            <a:srgbClr val="F4B942"/>
+          </a:solidFill>
+          <a:ln/>
+        </p:spPr>
+      </p:sp>
+      <p:sp>
+        <p:nvSpPr>
+          <p:cNvPr id="6" name="Text 4"/>
+          <p:cNvSpPr txBox="1"/>
+          <p:nvPr/>
+        </p:nvSpPr>
+        <p:spPr>
+          <a:xfrm>
+            <a:off x="502920" y="438912"/>
+            <a:ext cx="3108960" cy="502920"/>
+          </a:xfrm>
+          <a:prstGeom prst="rect">
+            <a:avLst/>
+          </a:prstGeom>
+          <a:noFill/>
+          <a:ln/>
+        </p:spPr>
+        <p:txBody>
+          <a:bodyPr wrap="square" lIns="0" tIns="0" rIns="0" bIns="0" rtlCol="0" anchor="ctr"/>
+          <a:lstStyle/>
+          <a:p>
+            <a:pPr algn="ctr" indent="0" marL="0">
+              <a:buNone/>
+            </a:pPr>
+            <a:r>
+              <a:rPr lang="en-US" sz="1300" b="1" dirty="0">
+                <a:solidFill>
+                  <a:srgbClr val="101828"/>
+                </a:solidFill>
+                <a:latin typeface="IBM Plex Mono" pitchFamily="34" charset="0"/>
+                <a:ea typeface="IBM Plex Mono" pitchFamily="34" charset="-122"/>
+                <a:cs typeface="IBM Plex Mono" pitchFamily="34" charset="-120"/>
+              </a:rPr>
+              <a:t>★  FINAL CHALLENGE</a:t>
+            </a:r>
+            <a:endParaRPr lang="en-US" sz="1300" dirty="0"/>
+          </a:p>
+        </p:txBody>
+      </p:sp>
+      <p:sp>
+        <p:nvSpPr>
+          <p:cNvPr id="7" name="Text 5"/>
+          <p:cNvSpPr txBox="1"/>
+          <p:nvPr/>
+        </p:nvSpPr>
+        <p:spPr>
+          <a:xfrm>
+            <a:off x="502920" y="1097280"/>
+            <a:ext cx="11155680" cy="731520"/>
           </a:xfrm>
           <a:prstGeom prst="rect">
             <a:avLst/>
@@ -3304,7 +3914,7 @@
               <a:buNone/>
             </a:pPr>
             <a:r>
-              <a:rPr lang="en-US" sz="3200" b="1" dirty="0">
+              <a:rPr lang="en-US" sz="3400" b="1" dirty="0">
                 <a:solidFill>
                   <a:srgbClr val="101828"/>
                 </a:solidFill>
@@ -3312,65 +3922,26 @@
                 <a:ea typeface="IBM Plex Sans" pitchFamily="34" charset="-122"/>
                 <a:cs typeface="IBM Plex Sans" pitchFamily="34" charset="-120"/>
               </a:rPr>
-              <a:t>Worth knowing</a:t>
-            </a:r>
-            <a:endParaRPr lang="en-US" sz="3200" dirty="0"/>
-          </a:p>
-        </p:txBody>
-      </p:sp>
-      <p:sp>
-        <p:nvSpPr>
-          <p:cNvPr id="6" name="Text 4"/>
-          <p:cNvSpPr txBox="1"/>
-          <p:nvPr/>
-        </p:nvSpPr>
-        <p:spPr>
-          <a:xfrm>
-            <a:off x="502920" y="1170432"/>
-            <a:ext cx="11155680" cy="411480"/>
-          </a:xfrm>
-          <a:prstGeom prst="rect">
-            <a:avLst/>
-          </a:prstGeom>
-          <a:noFill/>
-          <a:ln/>
-        </p:spPr>
-        <p:txBody>
-          <a:bodyPr wrap="square" lIns="0" tIns="0" rIns="0" bIns="0" rtlCol="0" anchor="ctr"/>
-          <a:lstStyle/>
-          <a:p>
-            <a:pPr indent="0" marL="0">
-              <a:buNone/>
-            </a:pPr>
-            <a:r>
-              <a:rPr lang="en-US" sz="1500" dirty="0">
-                <a:solidFill>
-                  <a:srgbClr val="667085"/>
-                </a:solidFill>
-                <a:latin typeface="IBM Plex Sans" pitchFamily="34" charset="0"/>
-                <a:ea typeface="IBM Plex Sans" pitchFamily="34" charset="-122"/>
-                <a:cs typeface="IBM Plex Sans" pitchFamily="34" charset="-120"/>
-              </a:rPr>
-              <a:t>The information markers dotted around the room</a:t>
-            </a:r>
-            <a:endParaRPr lang="en-US" sz="1500" dirty="0"/>
-          </a:p>
-        </p:txBody>
-      </p:sp>
-      <p:sp>
-        <p:nvSpPr>
-          <p:cNvPr id="7" name="Shape 5"/>
+              <a:t>Read the file</a:t>
+            </a:r>
+            <a:endParaRPr lang="en-US" sz="3400" dirty="0"/>
+          </a:p>
+        </p:txBody>
+      </p:sp>
+      <p:sp>
+        <p:nvSpPr>
+          <p:cNvPr id="8" name="Shape 6"/>
           <p:cNvSpPr/>
           <p:nvPr/>
         </p:nvSpPr>
         <p:spPr>
           <a:xfrm>
-            <a:off x="502920" y="1828800"/>
-            <a:ext cx="5394960" cy="1737360"/>
+            <a:off x="502920" y="2011680"/>
+            <a:ext cx="11155680" cy="2194560"/>
           </a:xfrm>
           <a:prstGeom prst="roundRect">
             <a:avLst>
-              <a:gd name="adj" fmla="val 6316"/>
+              <a:gd name="adj" fmla="val 5000"/>
             </a:avLst>
           </a:prstGeom>
           <a:solidFill>
@@ -3386,14 +3957,14 @@
       </p:sp>
       <p:sp>
         <p:nvSpPr>
-          <p:cNvPr id="8" name="Text 6"/>
-          <p:cNvSpPr txBox="1"/>
-          <p:nvPr/>
-        </p:nvSpPr>
-        <p:spPr>
-          <a:xfrm>
-            <a:off x="822960" y="2011680"/>
-            <a:ext cx="4754880" cy="365760"/>
+          <p:cNvPr id="9" name="Text 7"/>
+          <p:cNvSpPr txBox="1"/>
+          <p:nvPr/>
+        </p:nvSpPr>
+        <p:spPr>
+          <a:xfrm>
+            <a:off x="1005840" y="2331720"/>
+            <a:ext cx="10149840" cy="1554480"/>
           </a:xfrm>
           <a:prstGeom prst="rect">
             <a:avLst/>
@@ -3406,52 +3977,52 @@
           <a:lstStyle/>
           <a:p>
             <a:pPr indent="0" marL="0">
-              <a:buNone/>
-            </a:pPr>
-            <a:r>
-              <a:rPr lang="en-US" sz="1600" b="1" dirty="0">
-                <a:solidFill>
-                  <a:srgbClr val="2D63FF"/>
+              <a:lnSpc>
+                <a:spcPct val="130000"/>
+              </a:lnSpc>
+              <a:buNone/>
+            </a:pPr>
+            <a:r>
+              <a:rPr lang="en-US" sz="2200" dirty="0">
+                <a:solidFill>
+                  <a:srgbClr val="101828"/>
                 </a:solidFill>
                 <a:latin typeface="IBM Plex Sans" pitchFamily="34" charset="0"/>
                 <a:ea typeface="IBM Plex Sans" pitchFamily="34" charset="-122"/>
                 <a:cs typeface="IBM Plex Sans" pitchFamily="34" charset="-120"/>
               </a:rPr>
-              <a:t>RAM is volatile</a:t>
-            </a:r>
-            <a:endParaRPr lang="en-US" sz="1600" dirty="0"/>
-          </a:p>
-        </p:txBody>
-      </p:sp>
-      <p:sp>
-        <p:nvSpPr>
-          <p:cNvPr id="9" name="Text 7"/>
-          <p:cNvSpPr txBox="1"/>
-          <p:nvPr/>
-        </p:nvSpPr>
-        <p:spPr>
-          <a:xfrm>
-            <a:off x="822960" y="2395728"/>
-            <a:ext cx="4754880" cy="1005840"/>
-          </a:xfrm>
-          <a:prstGeom prst="rect">
-            <a:avLst/>
-          </a:prstGeom>
-          <a:noFill/>
-          <a:ln/>
-        </p:spPr>
-        <p:txBody>
-          <a:bodyPr wrap="square" lIns="0" tIns="0" rIns="0" bIns="0" rtlCol="0" anchor="t"/>
+              <a:t>Five lines of the OCR Exam Reference Language, jumbled. Tap the star and put them into a working program that outputs every line of scores.txt.</a:t>
+            </a:r>
+            <a:endParaRPr lang="en-US" sz="2200" dirty="0"/>
+          </a:p>
+        </p:txBody>
+      </p:sp>
+      <p:sp>
+        <p:nvSpPr>
+          <p:cNvPr id="10" name="Text 8"/>
+          <p:cNvSpPr txBox="1"/>
+          <p:nvPr/>
+        </p:nvSpPr>
+        <p:spPr>
+          <a:xfrm>
+            <a:off x="502920" y="4526280"/>
+            <a:ext cx="11155680" cy="457200"/>
+          </a:xfrm>
+          <a:prstGeom prst="rect">
+            <a:avLst/>
+          </a:prstGeom>
+          <a:noFill/>
+          <a:ln/>
+        </p:spPr>
+        <p:txBody>
+          <a:bodyPr wrap="square" lIns="0" tIns="0" rIns="0" bIns="0" rtlCol="0" anchor="ctr"/>
           <a:lstStyle/>
           <a:p>
             <a:pPr indent="0" marL="0">
-              <a:lnSpc>
-                <a:spcPct val="120000"/>
-              </a:lnSpc>
-              <a:buNone/>
-            </a:pPr>
-            <a:r>
-              <a:rPr lang="en-US" sz="1300" dirty="0">
+              <a:buNone/>
+            </a:pPr>
+            <a:r>
+              <a:rPr lang="en-US" sz="1600" dirty="0">
                 <a:solidFill>
                   <a:srgbClr val="667085"/>
                 </a:solidFill>
@@ -3459,333 +4030,9 @@
                 <a:ea typeface="IBM Plex Sans" pitchFamily="34" charset="-122"/>
                 <a:cs typeface="IBM Plex Sans" pitchFamily="34" charset="-120"/>
               </a:rPr>
-              <a:t>RAM loses everything in it when the power goes, which is why it is called volatile. Secondary storage such as an SSD keeps data without power, and that is where files live.</a:t>
-            </a:r>
-            <a:endParaRPr lang="en-US" sz="1300" dirty="0"/>
-          </a:p>
-        </p:txBody>
-      </p:sp>
-      <p:sp>
-        <p:nvSpPr>
-          <p:cNvPr id="10" name="Shape 8"/>
-          <p:cNvSpPr/>
-          <p:nvPr/>
-        </p:nvSpPr>
-        <p:spPr>
-          <a:xfrm>
-            <a:off x="6217920" y="1828800"/>
-            <a:ext cx="5394960" cy="1737360"/>
-          </a:xfrm>
-          <a:prstGeom prst="roundRect">
-            <a:avLst>
-              <a:gd name="adj" fmla="val 6316"/>
-            </a:avLst>
-          </a:prstGeom>
-          <a:solidFill>
-            <a:srgbClr val="FFFFFF"/>
-          </a:solidFill>
-          <a:ln w="15875">
-            <a:solidFill>
-              <a:srgbClr val="08A6A6"/>
-            </a:solidFill>
-            <a:prstDash val="solid"/>
-          </a:ln>
-        </p:spPr>
-      </p:sp>
-      <p:sp>
-        <p:nvSpPr>
-          <p:cNvPr id="11" name="Text 9"/>
-          <p:cNvSpPr txBox="1"/>
-          <p:nvPr/>
-        </p:nvSpPr>
-        <p:spPr>
-          <a:xfrm>
-            <a:off x="6537960" y="2011680"/>
-            <a:ext cx="4754880" cy="365760"/>
-          </a:xfrm>
-          <a:prstGeom prst="rect">
-            <a:avLst/>
-          </a:prstGeom>
-          <a:noFill/>
-          <a:ln/>
-        </p:spPr>
-        <p:txBody>
-          <a:bodyPr wrap="square" lIns="0" tIns="0" rIns="0" bIns="0" rtlCol="0" anchor="ctr"/>
-          <a:lstStyle/>
-          <a:p>
-            <a:pPr indent="0" marL="0">
-              <a:buNone/>
-            </a:pPr>
-            <a:r>
-              <a:rPr lang="en-US" sz="1600" b="1" dirty="0">
-                <a:solidFill>
-                  <a:srgbClr val="08A6A6"/>
-                </a:solidFill>
-                <a:latin typeface="IBM Plex Sans" pitchFamily="34" charset="0"/>
-                <a:ea typeface="IBM Plex Sans" pitchFamily="34" charset="-122"/>
-                <a:cs typeface="IBM Plex Sans" pitchFamily="34" charset="-120"/>
-              </a:rPr>
-              <a:t>File paths</a:t>
+              <a:t>Predict on paper first, then look down and test it.</a:t>
             </a:r>
             <a:endParaRPr lang="en-US" sz="1600" dirty="0"/>
-          </a:p>
-        </p:txBody>
-      </p:sp>
-      <p:sp>
-        <p:nvSpPr>
-          <p:cNvPr id="12" name="Text 10"/>
-          <p:cNvSpPr txBox="1"/>
-          <p:nvPr/>
-        </p:nvSpPr>
-        <p:spPr>
-          <a:xfrm>
-            <a:off x="6537960" y="2395728"/>
-            <a:ext cx="4754880" cy="1005840"/>
-          </a:xfrm>
-          <a:prstGeom prst="rect">
-            <a:avLst/>
-          </a:prstGeom>
-          <a:noFill/>
-          <a:ln/>
-        </p:spPr>
-        <p:txBody>
-          <a:bodyPr wrap="square" lIns="0" tIns="0" rIns="0" bIns="0" rtlCol="0" anchor="t"/>
-          <a:lstStyle/>
-          <a:p>
-            <a:pPr indent="0" marL="0">
-              <a:lnSpc>
-                <a:spcPct val="120000"/>
-              </a:lnSpc>
-              <a:buNone/>
-            </a:pPr>
-            <a:r>
-              <a:rPr lang="en-US" sz="1300" dirty="0">
-                <a:solidFill>
-                  <a:srgbClr val="667085"/>
-                </a:solidFill>
-                <a:latin typeface="IBM Plex Sans" pitchFamily="34" charset="0"/>
-                <a:ea typeface="IBM Plex Sans" pitchFamily="34" charset="-122"/>
-                <a:cs typeface="IBM Plex Sans" pitchFamily="34" charset="-120"/>
-              </a:rPr>
-              <a:t>A file name on its own means a file in the same folder as the program. A longer path tells the operating system exactly where to look, which is why a program that works on one computer may not find its file on another.</a:t>
-            </a:r>
-            <a:endParaRPr lang="en-US" sz="1300" dirty="0"/>
-          </a:p>
-        </p:txBody>
-      </p:sp>
-      <p:sp>
-        <p:nvSpPr>
-          <p:cNvPr id="13" name="Shape 11"/>
-          <p:cNvSpPr/>
-          <p:nvPr/>
-        </p:nvSpPr>
-        <p:spPr>
-          <a:xfrm>
-            <a:off x="502920" y="3794760"/>
-            <a:ext cx="5394960" cy="1737360"/>
-          </a:xfrm>
-          <a:prstGeom prst="roundRect">
-            <a:avLst>
-              <a:gd name="adj" fmla="val 6316"/>
-            </a:avLst>
-          </a:prstGeom>
-          <a:solidFill>
-            <a:srgbClr val="FFFFFF"/>
-          </a:solidFill>
-          <a:ln w="15875">
-            <a:solidFill>
-              <a:srgbClr val="2D63FF"/>
-            </a:solidFill>
-            <a:prstDash val="solid"/>
-          </a:ln>
-        </p:spPr>
-      </p:sp>
-      <p:sp>
-        <p:nvSpPr>
-          <p:cNvPr id="14" name="Text 12"/>
-          <p:cNvSpPr txBox="1"/>
-          <p:nvPr/>
-        </p:nvSpPr>
-        <p:spPr>
-          <a:xfrm>
-            <a:off x="822960" y="3977640"/>
-            <a:ext cx="4754880" cy="365760"/>
-          </a:xfrm>
-          <a:prstGeom prst="rect">
-            <a:avLst/>
-          </a:prstGeom>
-          <a:noFill/>
-          <a:ln/>
-        </p:spPr>
-        <p:txBody>
-          <a:bodyPr wrap="square" lIns="0" tIns="0" rIns="0" bIns="0" rtlCol="0" anchor="ctr"/>
-          <a:lstStyle/>
-          <a:p>
-            <a:pPr indent="0" marL="0">
-              <a:buNone/>
-            </a:pPr>
-            <a:r>
-              <a:rPr lang="en-US" sz="1600" b="1" dirty="0">
-                <a:solidFill>
-                  <a:srgbClr val="2D63FF"/>
-                </a:solidFill>
-                <a:latin typeface="IBM Plex Sans" pitchFamily="34" charset="0"/>
-                <a:ea typeface="IBM Plex Sans" pitchFamily="34" charset="-122"/>
-                <a:cs typeface="IBM Plex Sans" pitchFamily="34" charset="-120"/>
-              </a:rPr>
-              <a:t>CSV files</a:t>
-            </a:r>
-            <a:endParaRPr lang="en-US" sz="1600" dirty="0"/>
-          </a:p>
-        </p:txBody>
-      </p:sp>
-      <p:sp>
-        <p:nvSpPr>
-          <p:cNvPr id="15" name="Text 13"/>
-          <p:cNvSpPr txBox="1"/>
-          <p:nvPr/>
-        </p:nvSpPr>
-        <p:spPr>
-          <a:xfrm>
-            <a:off x="822960" y="4361688"/>
-            <a:ext cx="4754880" cy="1005840"/>
-          </a:xfrm>
-          <a:prstGeom prst="rect">
-            <a:avLst/>
-          </a:prstGeom>
-          <a:noFill/>
-          <a:ln/>
-        </p:spPr>
-        <p:txBody>
-          <a:bodyPr wrap="square" lIns="0" tIns="0" rIns="0" bIns="0" rtlCol="0" anchor="t"/>
-          <a:lstStyle/>
-          <a:p>
-            <a:pPr indent="0" marL="0">
-              <a:lnSpc>
-                <a:spcPct val="120000"/>
-              </a:lnSpc>
-              <a:buNone/>
-            </a:pPr>
-            <a:r>
-              <a:rPr lang="en-US" sz="1300" dirty="0">
-                <a:solidFill>
-                  <a:srgbClr val="667085"/>
-                </a:solidFill>
-                <a:latin typeface="IBM Plex Sans" pitchFamily="34" charset="0"/>
-                <a:ea typeface="IBM Plex Sans" pitchFamily="34" charset="-122"/>
-                <a:cs typeface="IBM Plex Sans" pitchFamily="34" charset="-120"/>
-              </a:rPr>
-              <a:t>A comma separated values file puts one record on each line, with commas between the fields. Reading it line by line and splitting each line at the commas is how most simple data files are loaded.</a:t>
-            </a:r>
-            <a:endParaRPr lang="en-US" sz="1300" dirty="0"/>
-          </a:p>
-        </p:txBody>
-      </p:sp>
-      <p:sp>
-        <p:nvSpPr>
-          <p:cNvPr id="16" name="Shape 14"/>
-          <p:cNvSpPr/>
-          <p:nvPr/>
-        </p:nvSpPr>
-        <p:spPr>
-          <a:xfrm>
-            <a:off x="6217920" y="3794760"/>
-            <a:ext cx="5394960" cy="1737360"/>
-          </a:xfrm>
-          <a:prstGeom prst="roundRect">
-            <a:avLst>
-              <a:gd name="adj" fmla="val 6316"/>
-            </a:avLst>
-          </a:prstGeom>
-          <a:solidFill>
-            <a:srgbClr val="FFFFFF"/>
-          </a:solidFill>
-          <a:ln w="15875">
-            <a:solidFill>
-              <a:srgbClr val="08A6A6"/>
-            </a:solidFill>
-            <a:prstDash val="solid"/>
-          </a:ln>
-        </p:spPr>
-      </p:sp>
-      <p:sp>
-        <p:nvSpPr>
-          <p:cNvPr id="17" name="Text 15"/>
-          <p:cNvSpPr txBox="1"/>
-          <p:nvPr/>
-        </p:nvSpPr>
-        <p:spPr>
-          <a:xfrm>
-            <a:off x="6537960" y="3977640"/>
-            <a:ext cx="4754880" cy="365760"/>
-          </a:xfrm>
-          <a:prstGeom prst="rect">
-            <a:avLst/>
-          </a:prstGeom>
-          <a:noFill/>
-          <a:ln/>
-        </p:spPr>
-        <p:txBody>
-          <a:bodyPr wrap="square" lIns="0" tIns="0" rIns="0" bIns="0" rtlCol="0" anchor="ctr"/>
-          <a:lstStyle/>
-          <a:p>
-            <a:pPr indent="0" marL="0">
-              <a:buNone/>
-            </a:pPr>
-            <a:r>
-              <a:rPr lang="en-US" sz="1600" b="1" dirty="0">
-                <a:solidFill>
-                  <a:srgbClr val="08A6A6"/>
-                </a:solidFill>
-                <a:latin typeface="IBM Plex Sans" pitchFamily="34" charset="0"/>
-                <a:ea typeface="IBM Plex Sans" pitchFamily="34" charset="-122"/>
-                <a:cs typeface="IBM Plex Sans" pitchFamily="34" charset="-120"/>
-              </a:rPr>
-              <a:t>Text or binary</a:t>
-            </a:r>
-            <a:endParaRPr lang="en-US" sz="1600" dirty="0"/>
-          </a:p>
-        </p:txBody>
-      </p:sp>
-      <p:sp>
-        <p:nvSpPr>
-          <p:cNvPr id="18" name="Text 16"/>
-          <p:cNvSpPr txBox="1"/>
-          <p:nvPr/>
-        </p:nvSpPr>
-        <p:spPr>
-          <a:xfrm>
-            <a:off x="6537960" y="4361688"/>
-            <a:ext cx="4754880" cy="1005840"/>
-          </a:xfrm>
-          <a:prstGeom prst="rect">
-            <a:avLst/>
-          </a:prstGeom>
-          <a:noFill/>
-          <a:ln/>
-        </p:spPr>
-        <p:txBody>
-          <a:bodyPr wrap="square" lIns="0" tIns="0" rIns="0" bIns="0" rtlCol="0" anchor="t"/>
-          <a:lstStyle/>
-          <a:p>
-            <a:pPr indent="0" marL="0">
-              <a:lnSpc>
-                <a:spcPct val="120000"/>
-              </a:lnSpc>
-              <a:buNone/>
-            </a:pPr>
-            <a:r>
-              <a:rPr lang="en-US" sz="1300" dirty="0">
-                <a:solidFill>
-                  <a:srgbClr val="667085"/>
-                </a:solidFill>
-                <a:latin typeface="IBM Plex Sans" pitchFamily="34" charset="0"/>
-                <a:ea typeface="IBM Plex Sans" pitchFamily="34" charset="-122"/>
-                <a:cs typeface="IBM Plex Sans" pitchFamily="34" charset="-120"/>
-              </a:rPr>
-              <a:t>A text file stores characters you could read in a text editor. A binary file stores the raw bytes of an image or a sound, which look like nonsense if you open them as text.</a:t>
-            </a:r>
-            <a:endParaRPr lang="en-US" sz="1300" dirty="0"/>
           </a:p>
         </p:txBody>
       </p:sp>
@@ -3952,7 +4199,7 @@
                 <a:ea typeface="IBM Plex Sans" pitchFamily="34" charset="-122"/>
                 <a:cs typeface="IBM Plex Sans" pitchFamily="34" charset="-120"/>
               </a:rPr>
-              <a:t>Exam practice</a:t>
+              <a:t>Worth knowing</a:t>
             </a:r>
             <a:endParaRPr lang="en-US" sz="3200" dirty="0"/>
           </a:p>
@@ -3991,7 +4238,7 @@
                 <a:ea typeface="IBM Plex Sans" pitchFamily="34" charset="-122"/>
                 <a:cs typeface="IBM Plex Sans" pitchFamily="34" charset="-120"/>
               </a:rPr>
-              <a:t>Devices away. Answer from memory on the worksheet.</a:t>
+              <a:t>The information markers dotted around the room</a:t>
             </a:r>
             <a:endParaRPr lang="en-US" sz="1500" dirty="0"/>
           </a:p>
@@ -4006,11 +4253,11 @@
         <p:spPr>
           <a:xfrm>
             <a:off x="502920" y="1828800"/>
-            <a:ext cx="11155680" cy="1097280"/>
+            <a:ext cx="5394960" cy="1737360"/>
           </a:xfrm>
           <a:prstGeom prst="roundRect">
             <a:avLst>
-              <a:gd name="adj" fmla="val 10000"/>
+              <a:gd name="adj" fmla="val 6316"/>
             </a:avLst>
           </a:prstGeom>
           <a:solidFill>
@@ -4018,7 +4265,7 @@
           </a:solidFill>
           <a:ln w="15875">
             <a:solidFill>
-              <a:srgbClr val="D9DEE7"/>
+              <a:srgbClr val="2D63FF"/>
             </a:solidFill>
             <a:prstDash val="solid"/>
           </a:ln>
@@ -4032,8 +4279,8 @@
         </p:nvSpPr>
         <p:spPr>
           <a:xfrm>
-            <a:off x="914400" y="1938528"/>
-            <a:ext cx="9418320" cy="877824"/>
+            <a:off x="822960" y="2011680"/>
+            <a:ext cx="4754880" cy="365760"/>
           </a:xfrm>
           <a:prstGeom prst="rect">
             <a:avLst/>
@@ -4046,101 +4293,79 @@
           <a:lstStyle/>
           <a:p>
             <a:pPr indent="0" marL="0">
-              <a:lnSpc>
-                <a:spcPct val="118000"/>
-              </a:lnSpc>
-              <a:buNone/>
-            </a:pPr>
-            <a:r>
-              <a:rPr lang="en-US" sz="1700" dirty="0">
-                <a:solidFill>
-                  <a:srgbClr val="101828"/>
+              <a:buNone/>
+            </a:pPr>
+            <a:r>
+              <a:rPr lang="en-US" sz="1600" b="1" dirty="0">
+                <a:solidFill>
+                  <a:srgbClr val="2D63FF"/>
                 </a:solidFill>
                 <a:latin typeface="IBM Plex Sans" pitchFamily="34" charset="0"/>
                 <a:ea typeface="IBM Plex Sans" pitchFamily="34" charset="-122"/>
                 <a:cs typeface="IBM Plex Sans" pitchFamily="34" charset="-120"/>
               </a:rPr>
-              <a:t>State one reason why a program writes data to a file rather than keeping it in a variable.</a:t>
-            </a:r>
-            <a:endParaRPr lang="en-US" sz="1700" dirty="0"/>
-          </a:p>
-        </p:txBody>
-      </p:sp>
-      <p:sp>
-        <p:nvSpPr>
-          <p:cNvPr id="9" name="Shape 7"/>
+              <a:t>RAM is volatile</a:t>
+            </a:r>
+            <a:endParaRPr lang="en-US" sz="1600" dirty="0"/>
+          </a:p>
+        </p:txBody>
+      </p:sp>
+      <p:sp>
+        <p:nvSpPr>
+          <p:cNvPr id="9" name="Text 7"/>
+          <p:cNvSpPr txBox="1"/>
+          <p:nvPr/>
+        </p:nvSpPr>
+        <p:spPr>
+          <a:xfrm>
+            <a:off x="822960" y="2395728"/>
+            <a:ext cx="4754880" cy="1005840"/>
+          </a:xfrm>
+          <a:prstGeom prst="rect">
+            <a:avLst/>
+          </a:prstGeom>
+          <a:noFill/>
+          <a:ln/>
+        </p:spPr>
+        <p:txBody>
+          <a:bodyPr wrap="square" lIns="0" tIns="0" rIns="0" bIns="0" rtlCol="0" anchor="t"/>
+          <a:lstStyle/>
+          <a:p>
+            <a:pPr indent="0" marL="0">
+              <a:lnSpc>
+                <a:spcPct val="120000"/>
+              </a:lnSpc>
+              <a:buNone/>
+            </a:pPr>
+            <a:r>
+              <a:rPr lang="en-US" sz="1300" dirty="0">
+                <a:solidFill>
+                  <a:srgbClr val="667085"/>
+                </a:solidFill>
+                <a:latin typeface="IBM Plex Sans" pitchFamily="34" charset="0"/>
+                <a:ea typeface="IBM Plex Sans" pitchFamily="34" charset="-122"/>
+                <a:cs typeface="IBM Plex Sans" pitchFamily="34" charset="-120"/>
+              </a:rPr>
+              <a:t>RAM loses everything in it when the power goes, which is why it is called volatile. Secondary storage such as an SSD keeps data without power, and that is where files live.</a:t>
+            </a:r>
+            <a:endParaRPr lang="en-US" sz="1300" dirty="0"/>
+          </a:p>
+        </p:txBody>
+      </p:sp>
+      <p:sp>
+        <p:nvSpPr>
+          <p:cNvPr id="10" name="Shape 8"/>
           <p:cNvSpPr/>
           <p:nvPr/>
         </p:nvSpPr>
         <p:spPr>
           <a:xfrm>
-            <a:off x="10515600" y="2130552"/>
-            <a:ext cx="868680" cy="493776"/>
+            <a:off x="6217920" y="1828800"/>
+            <a:ext cx="5394960" cy="1737360"/>
           </a:xfrm>
           <a:prstGeom prst="roundRect">
             <a:avLst>
-              <a:gd name="adj" fmla="val 18519"/>
-            </a:avLst>
-          </a:prstGeom>
-          <a:solidFill>
-            <a:srgbClr val="EEF2FB"/>
-          </a:solidFill>
-          <a:ln/>
-        </p:spPr>
-      </p:sp>
-      <p:sp>
-        <p:nvSpPr>
-          <p:cNvPr id="10" name="Text 8"/>
-          <p:cNvSpPr txBox="1"/>
-          <p:nvPr/>
-        </p:nvSpPr>
-        <p:spPr>
-          <a:xfrm>
-            <a:off x="10515600" y="2130552"/>
-            <a:ext cx="868680" cy="493776"/>
-          </a:xfrm>
-          <a:prstGeom prst="rect">
-            <a:avLst/>
-          </a:prstGeom>
-          <a:noFill/>
-          <a:ln/>
-        </p:spPr>
-        <p:txBody>
-          <a:bodyPr wrap="square" lIns="0" tIns="0" rIns="0" bIns="0" rtlCol="0" anchor="ctr"/>
-          <a:lstStyle/>
-          <a:p>
-            <a:pPr algn="ctr" indent="0" marL="0">
-              <a:buNone/>
-            </a:pPr>
-            <a:r>
-              <a:rPr lang="en-US" sz="1500" b="1" dirty="0">
-                <a:solidFill>
-                  <a:srgbClr val="2D63FF"/>
-                </a:solidFill>
-                <a:latin typeface="IBM Plex Mono" pitchFamily="34" charset="0"/>
-                <a:ea typeface="IBM Plex Mono" pitchFamily="34" charset="-122"/>
-                <a:cs typeface="IBM Plex Mono" pitchFamily="34" charset="-120"/>
-              </a:rPr>
-              <a:t>[2]</a:t>
-            </a:r>
-            <a:endParaRPr lang="en-US" sz="1500" dirty="0"/>
-          </a:p>
-        </p:txBody>
-      </p:sp>
-      <p:sp>
-        <p:nvSpPr>
-          <p:cNvPr id="11" name="Shape 9"/>
-          <p:cNvSpPr/>
-          <p:nvPr/>
-        </p:nvSpPr>
-        <p:spPr>
-          <a:xfrm>
-            <a:off x="502920" y="3127248"/>
-            <a:ext cx="11155680" cy="1097280"/>
-          </a:xfrm>
-          <a:prstGeom prst="roundRect">
-            <a:avLst>
-              <a:gd name="adj" fmla="val 10000"/>
+              <a:gd name="adj" fmla="val 6316"/>
             </a:avLst>
           </a:prstGeom>
           <a:solidFill>
@@ -4148,7 +4373,7 @@
           </a:solidFill>
           <a:ln w="15875">
             <a:solidFill>
-              <a:srgbClr val="D9DEE7"/>
+              <a:srgbClr val="08A6A6"/>
             </a:solidFill>
             <a:prstDash val="solid"/>
           </a:ln>
@@ -4156,14 +4381,14 @@
       </p:sp>
       <p:sp>
         <p:nvSpPr>
-          <p:cNvPr id="12" name="Text 10"/>
-          <p:cNvSpPr txBox="1"/>
-          <p:nvPr/>
-        </p:nvSpPr>
-        <p:spPr>
-          <a:xfrm>
-            <a:off x="914400" y="3236976"/>
-            <a:ext cx="9418320" cy="877824"/>
+          <p:cNvPr id="11" name="Text 9"/>
+          <p:cNvSpPr txBox="1"/>
+          <p:nvPr/>
+        </p:nvSpPr>
+        <p:spPr>
+          <a:xfrm>
+            <a:off x="6537960" y="2011680"/>
+            <a:ext cx="4754880" cy="365760"/>
           </a:xfrm>
           <a:prstGeom prst="rect">
             <a:avLst/>
@@ -4176,23 +4401,62 @@
           <a:lstStyle/>
           <a:p>
             <a:pPr indent="0" marL="0">
-              <a:lnSpc>
-                <a:spcPct val="118000"/>
-              </a:lnSpc>
-              <a:buNone/>
-            </a:pPr>
-            <a:r>
-              <a:rPr lang="en-US" sz="1700" dirty="0">
-                <a:solidFill>
-                  <a:srgbClr val="101828"/>
+              <a:buNone/>
+            </a:pPr>
+            <a:r>
+              <a:rPr lang="en-US" sz="1600" b="1" dirty="0">
+                <a:solidFill>
+                  <a:srgbClr val="08A6A6"/>
                 </a:solidFill>
                 <a:latin typeface="IBM Plex Sans" pitchFamily="34" charset="0"/>
                 <a:ea typeface="IBM Plex Sans" pitchFamily="34" charset="-122"/>
                 <a:cs typeface="IBM Plex Sans" pitchFamily="34" charset="-120"/>
               </a:rPr>
-              <a:t>Describe the four operations a program carries out on a file, in the order they happen.</a:t>
-            </a:r>
-            <a:endParaRPr lang="en-US" sz="1700" dirty="0"/>
+              <a:t>File paths</a:t>
+            </a:r>
+            <a:endParaRPr lang="en-US" sz="1600" dirty="0"/>
+          </a:p>
+        </p:txBody>
+      </p:sp>
+      <p:sp>
+        <p:nvSpPr>
+          <p:cNvPr id="12" name="Text 10"/>
+          <p:cNvSpPr txBox="1"/>
+          <p:nvPr/>
+        </p:nvSpPr>
+        <p:spPr>
+          <a:xfrm>
+            <a:off x="6537960" y="2395728"/>
+            <a:ext cx="4754880" cy="1005840"/>
+          </a:xfrm>
+          <a:prstGeom prst="rect">
+            <a:avLst/>
+          </a:prstGeom>
+          <a:noFill/>
+          <a:ln/>
+        </p:spPr>
+        <p:txBody>
+          <a:bodyPr wrap="square" lIns="0" tIns="0" rIns="0" bIns="0" rtlCol="0" anchor="t"/>
+          <a:lstStyle/>
+          <a:p>
+            <a:pPr indent="0" marL="0">
+              <a:lnSpc>
+                <a:spcPct val="120000"/>
+              </a:lnSpc>
+              <a:buNone/>
+            </a:pPr>
+            <a:r>
+              <a:rPr lang="en-US" sz="1300" dirty="0">
+                <a:solidFill>
+                  <a:srgbClr val="667085"/>
+                </a:solidFill>
+                <a:latin typeface="IBM Plex Sans" pitchFamily="34" charset="0"/>
+                <a:ea typeface="IBM Plex Sans" pitchFamily="34" charset="-122"/>
+                <a:cs typeface="IBM Plex Sans" pitchFamily="34" charset="-120"/>
+              </a:rPr>
+              <a:t>A file name on its own means a file in the same folder as the program. A longer path tells the operating system exactly where to look, which is why a program that works on one computer may not find its file on another.</a:t>
+            </a:r>
+            <a:endParaRPr lang="en-US" sz="1300" dirty="0"/>
           </a:p>
         </p:txBody>
       </p:sp>
@@ -4204,73 +4468,12 @@
         </p:nvSpPr>
         <p:spPr>
           <a:xfrm>
-            <a:off x="10515600" y="3429000"/>
-            <a:ext cx="868680" cy="493776"/>
+            <a:off x="502920" y="3794760"/>
+            <a:ext cx="5394960" cy="1737360"/>
           </a:xfrm>
           <a:prstGeom prst="roundRect">
             <a:avLst>
-              <a:gd name="adj" fmla="val 18519"/>
-            </a:avLst>
-          </a:prstGeom>
-          <a:solidFill>
-            <a:srgbClr val="EEF2FB"/>
-          </a:solidFill>
-          <a:ln/>
-        </p:spPr>
-      </p:sp>
-      <p:sp>
-        <p:nvSpPr>
-          <p:cNvPr id="14" name="Text 12"/>
-          <p:cNvSpPr txBox="1"/>
-          <p:nvPr/>
-        </p:nvSpPr>
-        <p:spPr>
-          <a:xfrm>
-            <a:off x="10515600" y="3429000"/>
-            <a:ext cx="868680" cy="493776"/>
-          </a:xfrm>
-          <a:prstGeom prst="rect">
-            <a:avLst/>
-          </a:prstGeom>
-          <a:noFill/>
-          <a:ln/>
-        </p:spPr>
-        <p:txBody>
-          <a:bodyPr wrap="square" lIns="0" tIns="0" rIns="0" bIns="0" rtlCol="0" anchor="ctr"/>
-          <a:lstStyle/>
-          <a:p>
-            <a:pPr algn="ctr" indent="0" marL="0">
-              <a:buNone/>
-            </a:pPr>
-            <a:r>
-              <a:rPr lang="en-US" sz="1500" b="1" dirty="0">
-                <a:solidFill>
-                  <a:srgbClr val="2D63FF"/>
-                </a:solidFill>
-                <a:latin typeface="IBM Plex Mono" pitchFamily="34" charset="0"/>
-                <a:ea typeface="IBM Plex Mono" pitchFamily="34" charset="-122"/>
-                <a:cs typeface="IBM Plex Mono" pitchFamily="34" charset="-120"/>
-              </a:rPr>
-              <a:t>[4]</a:t>
-            </a:r>
-            <a:endParaRPr lang="en-US" sz="1500" dirty="0"/>
-          </a:p>
-        </p:txBody>
-      </p:sp>
-      <p:sp>
-        <p:nvSpPr>
-          <p:cNvPr id="15" name="Shape 13"/>
-          <p:cNvSpPr/>
-          <p:nvPr/>
-        </p:nvSpPr>
-        <p:spPr>
-          <a:xfrm>
-            <a:off x="502920" y="4425696"/>
-            <a:ext cx="11155680" cy="1097280"/>
-          </a:xfrm>
-          <a:prstGeom prst="roundRect">
-            <a:avLst>
-              <a:gd name="adj" fmla="val 10000"/>
+              <a:gd name="adj" fmla="val 6316"/>
             </a:avLst>
           </a:prstGeom>
           <a:solidFill>
@@ -4278,7 +4481,7 @@
           </a:solidFill>
           <a:ln w="15875">
             <a:solidFill>
-              <a:srgbClr val="D9DEE7"/>
+              <a:srgbClr val="2D63FF"/>
             </a:solidFill>
             <a:prstDash val="solid"/>
           </a:ln>
@@ -4286,14 +4489,14 @@
       </p:sp>
       <p:sp>
         <p:nvSpPr>
-          <p:cNvPr id="16" name="Text 14"/>
-          <p:cNvSpPr txBox="1"/>
-          <p:nvPr/>
-        </p:nvSpPr>
-        <p:spPr>
-          <a:xfrm>
-            <a:off x="914400" y="4535424"/>
-            <a:ext cx="9418320" cy="877824"/>
+          <p:cNvPr id="14" name="Text 12"/>
+          <p:cNvSpPr txBox="1"/>
+          <p:nvPr/>
+        </p:nvSpPr>
+        <p:spPr>
+          <a:xfrm>
+            <a:off x="822960" y="3977640"/>
+            <a:ext cx="4754880" cy="365760"/>
           </a:xfrm>
           <a:prstGeom prst="rect">
             <a:avLst/>
@@ -4306,47 +4509,130 @@
           <a:lstStyle/>
           <a:p>
             <a:pPr indent="0" marL="0">
-              <a:lnSpc>
-                <a:spcPct val="118000"/>
-              </a:lnSpc>
-              <a:buNone/>
-            </a:pPr>
-            <a:r>
-              <a:rPr lang="en-US" sz="1700" dirty="0">
-                <a:solidFill>
-                  <a:srgbClr val="101828"/>
+              <a:buNone/>
+            </a:pPr>
+            <a:r>
+              <a:rPr lang="en-US" sz="1600" b="1" dirty="0">
+                <a:solidFill>
+                  <a:srgbClr val="2D63FF"/>
                 </a:solidFill>
                 <a:latin typeface="IBM Plex Sans" pitchFamily="34" charset="0"/>
                 <a:ea typeface="IBM Plex Sans" pitchFamily="34" charset="-122"/>
                 <a:cs typeface="IBM Plex Sans" pitchFamily="34" charset="-120"/>
               </a:rPr>
-              <a:t>A program records every login in a file called log.txt. Explain why the file should be opened in append mode rather than write mode.</a:t>
-            </a:r>
-            <a:endParaRPr lang="en-US" sz="1700" dirty="0"/>
-          </a:p>
-        </p:txBody>
-      </p:sp>
-      <p:sp>
-        <p:nvSpPr>
-          <p:cNvPr id="17" name="Shape 15"/>
+              <a:t>CSV files</a:t>
+            </a:r>
+            <a:endParaRPr lang="en-US" sz="1600" dirty="0"/>
+          </a:p>
+        </p:txBody>
+      </p:sp>
+      <p:sp>
+        <p:nvSpPr>
+          <p:cNvPr id="15" name="Text 13"/>
+          <p:cNvSpPr txBox="1"/>
+          <p:nvPr/>
+        </p:nvSpPr>
+        <p:spPr>
+          <a:xfrm>
+            <a:off x="822960" y="4361688"/>
+            <a:ext cx="4754880" cy="1005840"/>
+          </a:xfrm>
+          <a:prstGeom prst="rect">
+            <a:avLst/>
+          </a:prstGeom>
+          <a:noFill/>
+          <a:ln/>
+        </p:spPr>
+        <p:txBody>
+          <a:bodyPr wrap="square" lIns="0" tIns="0" rIns="0" bIns="0" rtlCol="0" anchor="t"/>
+          <a:lstStyle/>
+          <a:p>
+            <a:pPr indent="0" marL="0">
+              <a:lnSpc>
+                <a:spcPct val="120000"/>
+              </a:lnSpc>
+              <a:buNone/>
+            </a:pPr>
+            <a:r>
+              <a:rPr lang="en-US" sz="1300" dirty="0">
+                <a:solidFill>
+                  <a:srgbClr val="667085"/>
+                </a:solidFill>
+                <a:latin typeface="IBM Plex Sans" pitchFamily="34" charset="0"/>
+                <a:ea typeface="IBM Plex Sans" pitchFamily="34" charset="-122"/>
+                <a:cs typeface="IBM Plex Sans" pitchFamily="34" charset="-120"/>
+              </a:rPr>
+              <a:t>A comma separated values file puts one record on each line, with commas between the fields. Reading it line by line and splitting each line at the commas is how most simple data files are loaded.</a:t>
+            </a:r>
+            <a:endParaRPr lang="en-US" sz="1300" dirty="0"/>
+          </a:p>
+        </p:txBody>
+      </p:sp>
+      <p:sp>
+        <p:nvSpPr>
+          <p:cNvPr id="16" name="Shape 14"/>
           <p:cNvSpPr/>
           <p:nvPr/>
         </p:nvSpPr>
         <p:spPr>
           <a:xfrm>
-            <a:off x="10515600" y="4727448"/>
-            <a:ext cx="868680" cy="493776"/>
+            <a:off x="6217920" y="3794760"/>
+            <a:ext cx="5394960" cy="1737360"/>
           </a:xfrm>
           <a:prstGeom prst="roundRect">
             <a:avLst>
-              <a:gd name="adj" fmla="val 18519"/>
+              <a:gd name="adj" fmla="val 6316"/>
             </a:avLst>
           </a:prstGeom>
           <a:solidFill>
-            <a:srgbClr val="EEF2FB"/>
+            <a:srgbClr val="FFFFFF"/>
           </a:solidFill>
-          <a:ln/>
-        </p:spPr>
+          <a:ln w="15875">
+            <a:solidFill>
+              <a:srgbClr val="08A6A6"/>
+            </a:solidFill>
+            <a:prstDash val="solid"/>
+          </a:ln>
+        </p:spPr>
+      </p:sp>
+      <p:sp>
+        <p:nvSpPr>
+          <p:cNvPr id="17" name="Text 15"/>
+          <p:cNvSpPr txBox="1"/>
+          <p:nvPr/>
+        </p:nvSpPr>
+        <p:spPr>
+          <a:xfrm>
+            <a:off x="6537960" y="3977640"/>
+            <a:ext cx="4754880" cy="365760"/>
+          </a:xfrm>
+          <a:prstGeom prst="rect">
+            <a:avLst/>
+          </a:prstGeom>
+          <a:noFill/>
+          <a:ln/>
+        </p:spPr>
+        <p:txBody>
+          <a:bodyPr wrap="square" lIns="0" tIns="0" rIns="0" bIns="0" rtlCol="0" anchor="ctr"/>
+          <a:lstStyle/>
+          <a:p>
+            <a:pPr indent="0" marL="0">
+              <a:buNone/>
+            </a:pPr>
+            <a:r>
+              <a:rPr lang="en-US" sz="1600" b="1" dirty="0">
+                <a:solidFill>
+                  <a:srgbClr val="08A6A6"/>
+                </a:solidFill>
+                <a:latin typeface="IBM Plex Sans" pitchFamily="34" charset="0"/>
+                <a:ea typeface="IBM Plex Sans" pitchFamily="34" charset="-122"/>
+                <a:cs typeface="IBM Plex Sans" pitchFamily="34" charset="-120"/>
+              </a:rPr>
+              <a:t>Text or binary</a:t>
+            </a:r>
+            <a:endParaRPr lang="en-US" sz="1600" dirty="0"/>
+          </a:p>
+        </p:txBody>
       </p:sp>
       <p:sp>
         <p:nvSpPr>
@@ -4356,34 +4642,37 @@
         </p:nvSpPr>
         <p:spPr>
           <a:xfrm>
-            <a:off x="10515600" y="4727448"/>
-            <a:ext cx="868680" cy="493776"/>
-          </a:xfrm>
-          <a:prstGeom prst="rect">
-            <a:avLst/>
-          </a:prstGeom>
-          <a:noFill/>
-          <a:ln/>
-        </p:spPr>
-        <p:txBody>
-          <a:bodyPr wrap="square" lIns="0" tIns="0" rIns="0" bIns="0" rtlCol="0" anchor="ctr"/>
-          <a:lstStyle/>
-          <a:p>
-            <a:pPr algn="ctr" indent="0" marL="0">
-              <a:buNone/>
-            </a:pPr>
-            <a:r>
-              <a:rPr lang="en-US" sz="1500" b="1" dirty="0">
-                <a:solidFill>
-                  <a:srgbClr val="2D63FF"/>
-                </a:solidFill>
-                <a:latin typeface="IBM Plex Mono" pitchFamily="34" charset="0"/>
-                <a:ea typeface="IBM Plex Mono" pitchFamily="34" charset="-122"/>
-                <a:cs typeface="IBM Plex Mono" pitchFamily="34" charset="-120"/>
-              </a:rPr>
-              <a:t>[3]</a:t>
-            </a:r>
-            <a:endParaRPr lang="en-US" sz="1500" dirty="0"/>
+            <a:off x="6537960" y="4361688"/>
+            <a:ext cx="4754880" cy="1005840"/>
+          </a:xfrm>
+          <a:prstGeom prst="rect">
+            <a:avLst/>
+          </a:prstGeom>
+          <a:noFill/>
+          <a:ln/>
+        </p:spPr>
+        <p:txBody>
+          <a:bodyPr wrap="square" lIns="0" tIns="0" rIns="0" bIns="0" rtlCol="0" anchor="t"/>
+          <a:lstStyle/>
+          <a:p>
+            <a:pPr indent="0" marL="0">
+              <a:lnSpc>
+                <a:spcPct val="120000"/>
+              </a:lnSpc>
+              <a:buNone/>
+            </a:pPr>
+            <a:r>
+              <a:rPr lang="en-US" sz="1300" dirty="0">
+                <a:solidFill>
+                  <a:srgbClr val="667085"/>
+                </a:solidFill>
+                <a:latin typeface="IBM Plex Sans" pitchFamily="34" charset="0"/>
+                <a:ea typeface="IBM Plex Sans" pitchFamily="34" charset="-122"/>
+                <a:cs typeface="IBM Plex Sans" pitchFamily="34" charset="-120"/>
+              </a:rPr>
+              <a:t>A text file stores characters you could read in a text editor. A binary file stores the raw bytes of an image or a sound, which look like nonsense if you open them as text.</a:t>
+            </a:r>
+            <a:endParaRPr lang="en-US" sz="1300" dirty="0"/>
           </a:p>
         </p:txBody>
       </p:sp>
@@ -4398,6 +4687,604 @@
 <file path=ppt/slides/slide14.xml><?xml version="1.0" encoding="utf-8"?>
 <p:sld xmlns:a="http://schemas.openxmlformats.org/drawingml/2006/main" xmlns:r="http://schemas.openxmlformats.org/officeDocument/2006/relationships" xmlns:p="http://schemas.openxmlformats.org/presentationml/2006/main">
   <p:cSld name="Slide 14">
+    <p:bg>
+      <p:bgPr>
+        <a:solidFill>
+          <a:srgbClr val="F7F7F4"/>
+        </a:solidFill>
+      </p:bgPr>
+    </p:bg>
+    <p:spTree>
+      <p:nvGrpSpPr>
+        <p:cNvPr id="1" name=""/>
+        <p:cNvGrpSpPr/>
+        <p:nvPr/>
+      </p:nvGrpSpPr>
+      <p:grpSpPr>
+        <a:xfrm>
+          <a:off x="0" y="0"/>
+          <a:ext cx="0" cy="0"/>
+          <a:chOff x="0" y="0"/>
+          <a:chExt cx="0" cy="0"/>
+        </a:xfrm>
+      </p:grpSpPr>
+      <p:sp>
+        <p:nvSpPr>
+          <p:cNvPr id="2" name="Shape 0"/>
+          <p:cNvSpPr/>
+          <p:nvPr/>
+        </p:nvSpPr>
+        <p:spPr>
+          <a:xfrm>
+            <a:off x="0" y="0"/>
+            <a:ext cx="12188952" cy="82296"/>
+          </a:xfrm>
+          <a:prstGeom prst="rect">
+            <a:avLst/>
+          </a:prstGeom>
+          <a:solidFill>
+            <a:srgbClr val="2D63FF"/>
+          </a:solidFill>
+          <a:ln/>
+        </p:spPr>
+      </p:sp>
+      <p:sp>
+        <p:nvSpPr>
+          <p:cNvPr id="3" name="Text 1"/>
+          <p:cNvSpPr txBox="1"/>
+          <p:nvPr/>
+        </p:nvSpPr>
+        <p:spPr>
+          <a:xfrm>
+            <a:off x="502920" y="6236208"/>
+            <a:ext cx="7772400" cy="365760"/>
+          </a:xfrm>
+          <a:prstGeom prst="rect">
+            <a:avLst/>
+          </a:prstGeom>
+          <a:noFill/>
+          <a:ln/>
+        </p:spPr>
+        <p:txBody>
+          <a:bodyPr wrap="square" lIns="0" tIns="0" rIns="0" bIns="0" rtlCol="0" anchor="ctr"/>
+          <a:lstStyle/>
+          <a:p>
+            <a:pPr indent="0" marL="0">
+              <a:buNone/>
+            </a:pPr>
+            <a:r>
+              <a:rPr lang="en-US" sz="1100" dirty="0">
+                <a:solidFill>
+                  <a:srgbClr val="667085"/>
+                </a:solidFill>
+                <a:latin typeface="IBM Plex Mono" pitchFamily="34" charset="0"/>
+                <a:ea typeface="IBM Plex Mono" pitchFamily="34" charset="-122"/>
+                <a:cs typeface="IBM Plex Mono" pitchFamily="34" charset="-120"/>
+              </a:rPr>
+              <a:t>2.2 Programming fundamentals  |  Lesson 3</a:t>
+            </a:r>
+            <a:endParaRPr lang="en-US" sz="1100" dirty="0"/>
+          </a:p>
+        </p:txBody>
+      </p:sp>
+      <p:sp>
+        <p:nvSpPr>
+          <p:cNvPr id="4" name="Text 2"/>
+          <p:cNvSpPr txBox="1"/>
+          <p:nvPr/>
+        </p:nvSpPr>
+        <p:spPr>
+          <a:xfrm>
+            <a:off x="9326880" y="6236208"/>
+            <a:ext cx="2377440" cy="365760"/>
+          </a:xfrm>
+          <a:prstGeom prst="rect">
+            <a:avLst/>
+          </a:prstGeom>
+          <a:noFill/>
+          <a:ln/>
+        </p:spPr>
+        <p:txBody>
+          <a:bodyPr wrap="square" lIns="0" tIns="0" rIns="0" bIns="0" rtlCol="0" anchor="ctr"/>
+          <a:lstStyle/>
+          <a:p>
+            <a:pPr algn="r" indent="0" marL="0">
+              <a:buNone/>
+            </a:pPr>
+            <a:r>
+              <a:rPr lang="en-US" sz="1100" dirty="0">
+                <a:solidFill>
+                  <a:srgbClr val="667085"/>
+                </a:solidFill>
+                <a:latin typeface="IBM Plex Mono" pitchFamily="34" charset="0"/>
+                <a:ea typeface="IBM Plex Mono" pitchFamily="34" charset="-122"/>
+                <a:cs typeface="IBM Plex Mono" pitchFamily="34" charset="-120"/>
+              </a:rPr>
+              <a:t>Revise 360</a:t>
+            </a:r>
+            <a:endParaRPr lang="en-US" sz="1100" dirty="0"/>
+          </a:p>
+        </p:txBody>
+      </p:sp>
+      <p:sp>
+        <p:nvSpPr>
+          <p:cNvPr id="5" name="Text 3"/>
+          <p:cNvSpPr txBox="1"/>
+          <p:nvPr/>
+        </p:nvSpPr>
+        <p:spPr>
+          <a:xfrm>
+            <a:off x="502920" y="411480"/>
+            <a:ext cx="11155680" cy="777240"/>
+          </a:xfrm>
+          <a:prstGeom prst="rect">
+            <a:avLst/>
+          </a:prstGeom>
+          <a:noFill/>
+          <a:ln/>
+        </p:spPr>
+        <p:txBody>
+          <a:bodyPr wrap="square" lIns="0" tIns="0" rIns="0" bIns="0" rtlCol="0" anchor="ctr"/>
+          <a:lstStyle/>
+          <a:p>
+            <a:pPr indent="0" marL="0">
+              <a:buNone/>
+            </a:pPr>
+            <a:r>
+              <a:rPr lang="en-US" sz="3200" b="1" dirty="0">
+                <a:solidFill>
+                  <a:srgbClr val="101828"/>
+                </a:solidFill>
+                <a:latin typeface="IBM Plex Sans" pitchFamily="34" charset="0"/>
+                <a:ea typeface="IBM Plex Sans" pitchFamily="34" charset="-122"/>
+                <a:cs typeface="IBM Plex Sans" pitchFamily="34" charset="-120"/>
+              </a:rPr>
+              <a:t>Exam practice</a:t>
+            </a:r>
+            <a:endParaRPr lang="en-US" sz="3200" dirty="0"/>
+          </a:p>
+        </p:txBody>
+      </p:sp>
+      <p:sp>
+        <p:nvSpPr>
+          <p:cNvPr id="6" name="Text 4"/>
+          <p:cNvSpPr txBox="1"/>
+          <p:nvPr/>
+        </p:nvSpPr>
+        <p:spPr>
+          <a:xfrm>
+            <a:off x="502920" y="1170432"/>
+            <a:ext cx="11155680" cy="411480"/>
+          </a:xfrm>
+          <a:prstGeom prst="rect">
+            <a:avLst/>
+          </a:prstGeom>
+          <a:noFill/>
+          <a:ln/>
+        </p:spPr>
+        <p:txBody>
+          <a:bodyPr wrap="square" lIns="0" tIns="0" rIns="0" bIns="0" rtlCol="0" anchor="ctr"/>
+          <a:lstStyle/>
+          <a:p>
+            <a:pPr indent="0" marL="0">
+              <a:buNone/>
+            </a:pPr>
+            <a:r>
+              <a:rPr lang="en-US" sz="1500" dirty="0">
+                <a:solidFill>
+                  <a:srgbClr val="667085"/>
+                </a:solidFill>
+                <a:latin typeface="IBM Plex Sans" pitchFamily="34" charset="0"/>
+                <a:ea typeface="IBM Plex Sans" pitchFamily="34" charset="-122"/>
+                <a:cs typeface="IBM Plex Sans" pitchFamily="34" charset="-120"/>
+              </a:rPr>
+              <a:t>Devices away. Answer from memory on the worksheet.</a:t>
+            </a:r>
+            <a:endParaRPr lang="en-US" sz="1500" dirty="0"/>
+          </a:p>
+        </p:txBody>
+      </p:sp>
+      <p:sp>
+        <p:nvSpPr>
+          <p:cNvPr id="7" name="Shape 5"/>
+          <p:cNvSpPr/>
+          <p:nvPr/>
+        </p:nvSpPr>
+        <p:spPr>
+          <a:xfrm>
+            <a:off x="502920" y="1828800"/>
+            <a:ext cx="11155680" cy="1097280"/>
+          </a:xfrm>
+          <a:prstGeom prst="roundRect">
+            <a:avLst>
+              <a:gd name="adj" fmla="val 10000"/>
+            </a:avLst>
+          </a:prstGeom>
+          <a:solidFill>
+            <a:srgbClr val="FFFFFF"/>
+          </a:solidFill>
+          <a:ln w="15875">
+            <a:solidFill>
+              <a:srgbClr val="D9DEE7"/>
+            </a:solidFill>
+            <a:prstDash val="solid"/>
+          </a:ln>
+        </p:spPr>
+      </p:sp>
+      <p:sp>
+        <p:nvSpPr>
+          <p:cNvPr id="8" name="Text 6"/>
+          <p:cNvSpPr txBox="1"/>
+          <p:nvPr/>
+        </p:nvSpPr>
+        <p:spPr>
+          <a:xfrm>
+            <a:off x="914400" y="1938528"/>
+            <a:ext cx="9418320" cy="877824"/>
+          </a:xfrm>
+          <a:prstGeom prst="rect">
+            <a:avLst/>
+          </a:prstGeom>
+          <a:noFill/>
+          <a:ln/>
+        </p:spPr>
+        <p:txBody>
+          <a:bodyPr wrap="square" lIns="0" tIns="0" rIns="0" bIns="0" rtlCol="0" anchor="ctr"/>
+          <a:lstStyle/>
+          <a:p>
+            <a:pPr indent="0" marL="0">
+              <a:lnSpc>
+                <a:spcPct val="118000"/>
+              </a:lnSpc>
+              <a:buNone/>
+            </a:pPr>
+            <a:r>
+              <a:rPr lang="en-US" sz="1700" dirty="0">
+                <a:solidFill>
+                  <a:srgbClr val="101828"/>
+                </a:solidFill>
+                <a:latin typeface="IBM Plex Sans" pitchFamily="34" charset="0"/>
+                <a:ea typeface="IBM Plex Sans" pitchFamily="34" charset="-122"/>
+                <a:cs typeface="IBM Plex Sans" pitchFamily="34" charset="-120"/>
+              </a:rPr>
+              <a:t>State one reason why a program writes data to a file rather than keeping it in a variable.</a:t>
+            </a:r>
+            <a:endParaRPr lang="en-US" sz="1700" dirty="0"/>
+          </a:p>
+        </p:txBody>
+      </p:sp>
+      <p:sp>
+        <p:nvSpPr>
+          <p:cNvPr id="9" name="Shape 7"/>
+          <p:cNvSpPr/>
+          <p:nvPr/>
+        </p:nvSpPr>
+        <p:spPr>
+          <a:xfrm>
+            <a:off x="10515600" y="2130552"/>
+            <a:ext cx="868680" cy="493776"/>
+          </a:xfrm>
+          <a:prstGeom prst="roundRect">
+            <a:avLst>
+              <a:gd name="adj" fmla="val 18519"/>
+            </a:avLst>
+          </a:prstGeom>
+          <a:solidFill>
+            <a:srgbClr val="EEF2FB"/>
+          </a:solidFill>
+          <a:ln/>
+        </p:spPr>
+      </p:sp>
+      <p:sp>
+        <p:nvSpPr>
+          <p:cNvPr id="10" name="Text 8"/>
+          <p:cNvSpPr txBox="1"/>
+          <p:nvPr/>
+        </p:nvSpPr>
+        <p:spPr>
+          <a:xfrm>
+            <a:off x="10515600" y="2130552"/>
+            <a:ext cx="868680" cy="493776"/>
+          </a:xfrm>
+          <a:prstGeom prst="rect">
+            <a:avLst/>
+          </a:prstGeom>
+          <a:noFill/>
+          <a:ln/>
+        </p:spPr>
+        <p:txBody>
+          <a:bodyPr wrap="square" lIns="0" tIns="0" rIns="0" bIns="0" rtlCol="0" anchor="ctr"/>
+          <a:lstStyle/>
+          <a:p>
+            <a:pPr algn="ctr" indent="0" marL="0">
+              <a:buNone/>
+            </a:pPr>
+            <a:r>
+              <a:rPr lang="en-US" sz="1500" b="1" dirty="0">
+                <a:solidFill>
+                  <a:srgbClr val="2D63FF"/>
+                </a:solidFill>
+                <a:latin typeface="IBM Plex Mono" pitchFamily="34" charset="0"/>
+                <a:ea typeface="IBM Plex Mono" pitchFamily="34" charset="-122"/>
+                <a:cs typeface="IBM Plex Mono" pitchFamily="34" charset="-120"/>
+              </a:rPr>
+              <a:t>[2]</a:t>
+            </a:r>
+            <a:endParaRPr lang="en-US" sz="1500" dirty="0"/>
+          </a:p>
+        </p:txBody>
+      </p:sp>
+      <p:sp>
+        <p:nvSpPr>
+          <p:cNvPr id="11" name="Shape 9"/>
+          <p:cNvSpPr/>
+          <p:nvPr/>
+        </p:nvSpPr>
+        <p:spPr>
+          <a:xfrm>
+            <a:off x="502920" y="3127248"/>
+            <a:ext cx="11155680" cy="1097280"/>
+          </a:xfrm>
+          <a:prstGeom prst="roundRect">
+            <a:avLst>
+              <a:gd name="adj" fmla="val 10000"/>
+            </a:avLst>
+          </a:prstGeom>
+          <a:solidFill>
+            <a:srgbClr val="FFFFFF"/>
+          </a:solidFill>
+          <a:ln w="15875">
+            <a:solidFill>
+              <a:srgbClr val="D9DEE7"/>
+            </a:solidFill>
+            <a:prstDash val="solid"/>
+          </a:ln>
+        </p:spPr>
+      </p:sp>
+      <p:sp>
+        <p:nvSpPr>
+          <p:cNvPr id="12" name="Text 10"/>
+          <p:cNvSpPr txBox="1"/>
+          <p:nvPr/>
+        </p:nvSpPr>
+        <p:spPr>
+          <a:xfrm>
+            <a:off x="914400" y="3236976"/>
+            <a:ext cx="9418320" cy="877824"/>
+          </a:xfrm>
+          <a:prstGeom prst="rect">
+            <a:avLst/>
+          </a:prstGeom>
+          <a:noFill/>
+          <a:ln/>
+        </p:spPr>
+        <p:txBody>
+          <a:bodyPr wrap="square" lIns="0" tIns="0" rIns="0" bIns="0" rtlCol="0" anchor="ctr"/>
+          <a:lstStyle/>
+          <a:p>
+            <a:pPr indent="0" marL="0">
+              <a:lnSpc>
+                <a:spcPct val="118000"/>
+              </a:lnSpc>
+              <a:buNone/>
+            </a:pPr>
+            <a:r>
+              <a:rPr lang="en-US" sz="1700" dirty="0">
+                <a:solidFill>
+                  <a:srgbClr val="101828"/>
+                </a:solidFill>
+                <a:latin typeface="IBM Plex Sans" pitchFamily="34" charset="0"/>
+                <a:ea typeface="IBM Plex Sans" pitchFamily="34" charset="-122"/>
+                <a:cs typeface="IBM Plex Sans" pitchFamily="34" charset="-120"/>
+              </a:rPr>
+              <a:t>Describe the four operations a program carries out on a file, in the order they happen.</a:t>
+            </a:r>
+            <a:endParaRPr lang="en-US" sz="1700" dirty="0"/>
+          </a:p>
+        </p:txBody>
+      </p:sp>
+      <p:sp>
+        <p:nvSpPr>
+          <p:cNvPr id="13" name="Shape 11"/>
+          <p:cNvSpPr/>
+          <p:nvPr/>
+        </p:nvSpPr>
+        <p:spPr>
+          <a:xfrm>
+            <a:off x="10515600" y="3429000"/>
+            <a:ext cx="868680" cy="493776"/>
+          </a:xfrm>
+          <a:prstGeom prst="roundRect">
+            <a:avLst>
+              <a:gd name="adj" fmla="val 18519"/>
+            </a:avLst>
+          </a:prstGeom>
+          <a:solidFill>
+            <a:srgbClr val="EEF2FB"/>
+          </a:solidFill>
+          <a:ln/>
+        </p:spPr>
+      </p:sp>
+      <p:sp>
+        <p:nvSpPr>
+          <p:cNvPr id="14" name="Text 12"/>
+          <p:cNvSpPr txBox="1"/>
+          <p:nvPr/>
+        </p:nvSpPr>
+        <p:spPr>
+          <a:xfrm>
+            <a:off x="10515600" y="3429000"/>
+            <a:ext cx="868680" cy="493776"/>
+          </a:xfrm>
+          <a:prstGeom prst="rect">
+            <a:avLst/>
+          </a:prstGeom>
+          <a:noFill/>
+          <a:ln/>
+        </p:spPr>
+        <p:txBody>
+          <a:bodyPr wrap="square" lIns="0" tIns="0" rIns="0" bIns="0" rtlCol="0" anchor="ctr"/>
+          <a:lstStyle/>
+          <a:p>
+            <a:pPr algn="ctr" indent="0" marL="0">
+              <a:buNone/>
+            </a:pPr>
+            <a:r>
+              <a:rPr lang="en-US" sz="1500" b="1" dirty="0">
+                <a:solidFill>
+                  <a:srgbClr val="2D63FF"/>
+                </a:solidFill>
+                <a:latin typeface="IBM Plex Mono" pitchFamily="34" charset="0"/>
+                <a:ea typeface="IBM Plex Mono" pitchFamily="34" charset="-122"/>
+                <a:cs typeface="IBM Plex Mono" pitchFamily="34" charset="-120"/>
+              </a:rPr>
+              <a:t>[4]</a:t>
+            </a:r>
+            <a:endParaRPr lang="en-US" sz="1500" dirty="0"/>
+          </a:p>
+        </p:txBody>
+      </p:sp>
+      <p:sp>
+        <p:nvSpPr>
+          <p:cNvPr id="15" name="Shape 13"/>
+          <p:cNvSpPr/>
+          <p:nvPr/>
+        </p:nvSpPr>
+        <p:spPr>
+          <a:xfrm>
+            <a:off x="502920" y="4425696"/>
+            <a:ext cx="11155680" cy="1097280"/>
+          </a:xfrm>
+          <a:prstGeom prst="roundRect">
+            <a:avLst>
+              <a:gd name="adj" fmla="val 10000"/>
+            </a:avLst>
+          </a:prstGeom>
+          <a:solidFill>
+            <a:srgbClr val="FFFFFF"/>
+          </a:solidFill>
+          <a:ln w="15875">
+            <a:solidFill>
+              <a:srgbClr val="D9DEE7"/>
+            </a:solidFill>
+            <a:prstDash val="solid"/>
+          </a:ln>
+        </p:spPr>
+      </p:sp>
+      <p:sp>
+        <p:nvSpPr>
+          <p:cNvPr id="16" name="Text 14"/>
+          <p:cNvSpPr txBox="1"/>
+          <p:nvPr/>
+        </p:nvSpPr>
+        <p:spPr>
+          <a:xfrm>
+            <a:off x="914400" y="4535424"/>
+            <a:ext cx="9418320" cy="877824"/>
+          </a:xfrm>
+          <a:prstGeom prst="rect">
+            <a:avLst/>
+          </a:prstGeom>
+          <a:noFill/>
+          <a:ln/>
+        </p:spPr>
+        <p:txBody>
+          <a:bodyPr wrap="square" lIns="0" tIns="0" rIns="0" bIns="0" rtlCol="0" anchor="ctr"/>
+          <a:lstStyle/>
+          <a:p>
+            <a:pPr indent="0" marL="0">
+              <a:lnSpc>
+                <a:spcPct val="118000"/>
+              </a:lnSpc>
+              <a:buNone/>
+            </a:pPr>
+            <a:r>
+              <a:rPr lang="en-US" sz="1700" dirty="0">
+                <a:solidFill>
+                  <a:srgbClr val="101828"/>
+                </a:solidFill>
+                <a:latin typeface="IBM Plex Sans" pitchFamily="34" charset="0"/>
+                <a:ea typeface="IBM Plex Sans" pitchFamily="34" charset="-122"/>
+                <a:cs typeface="IBM Plex Sans" pitchFamily="34" charset="-120"/>
+              </a:rPr>
+              <a:t>A program records every login in a file called log.txt. Explain why the file should be opened in append mode rather than write mode.</a:t>
+            </a:r>
+            <a:endParaRPr lang="en-US" sz="1700" dirty="0"/>
+          </a:p>
+        </p:txBody>
+      </p:sp>
+      <p:sp>
+        <p:nvSpPr>
+          <p:cNvPr id="17" name="Shape 15"/>
+          <p:cNvSpPr/>
+          <p:nvPr/>
+        </p:nvSpPr>
+        <p:spPr>
+          <a:xfrm>
+            <a:off x="10515600" y="4727448"/>
+            <a:ext cx="868680" cy="493776"/>
+          </a:xfrm>
+          <a:prstGeom prst="roundRect">
+            <a:avLst>
+              <a:gd name="adj" fmla="val 18519"/>
+            </a:avLst>
+          </a:prstGeom>
+          <a:solidFill>
+            <a:srgbClr val="EEF2FB"/>
+          </a:solidFill>
+          <a:ln/>
+        </p:spPr>
+      </p:sp>
+      <p:sp>
+        <p:nvSpPr>
+          <p:cNvPr id="18" name="Text 16"/>
+          <p:cNvSpPr txBox="1"/>
+          <p:nvPr/>
+        </p:nvSpPr>
+        <p:spPr>
+          <a:xfrm>
+            <a:off x="10515600" y="4727448"/>
+            <a:ext cx="868680" cy="493776"/>
+          </a:xfrm>
+          <a:prstGeom prst="rect">
+            <a:avLst/>
+          </a:prstGeom>
+          <a:noFill/>
+          <a:ln/>
+        </p:spPr>
+        <p:txBody>
+          <a:bodyPr wrap="square" lIns="0" tIns="0" rIns="0" bIns="0" rtlCol="0" anchor="ctr"/>
+          <a:lstStyle/>
+          <a:p>
+            <a:pPr algn="ctr" indent="0" marL="0">
+              <a:buNone/>
+            </a:pPr>
+            <a:r>
+              <a:rPr lang="en-US" sz="1500" b="1" dirty="0">
+                <a:solidFill>
+                  <a:srgbClr val="2D63FF"/>
+                </a:solidFill>
+                <a:latin typeface="IBM Plex Mono" pitchFamily="34" charset="0"/>
+                <a:ea typeface="IBM Plex Mono" pitchFamily="34" charset="-122"/>
+                <a:cs typeface="IBM Plex Mono" pitchFamily="34" charset="-120"/>
+              </a:rPr>
+              <a:t>[3]</a:t>
+            </a:r>
+            <a:endParaRPr lang="en-US" sz="1500" dirty="0"/>
+          </a:p>
+        </p:txBody>
+      </p:sp>
+    </p:spTree>
+  </p:cSld>
+  <p:clrMapOvr>
+    <a:masterClrMapping/>
+  </p:clrMapOvr>
+</p:sld>
+</file>
+
+<file path=ppt/slides/slide15.xml><?xml version="1.0" encoding="utf-8"?>
+<p:sld xmlns:a="http://schemas.openxmlformats.org/drawingml/2006/main" xmlns:r="http://schemas.openxmlformats.org/officeDocument/2006/relationships" xmlns:p="http://schemas.openxmlformats.org/presentationml/2006/main">
+  <p:cSld name="Slide 15">
     <p:bg>
       <p:bgPr>
         <a:solidFill>
